--- a/_dcs_portpolio/portfolio.pptx
+++ b/_dcs_portpolio/portfolio.pptx
@@ -18,6 +18,7 @@
     <p:sldId id="266" r:id="rId17"/>
     <p:sldId id="267" r:id="rId18"/>
     <p:sldId id="268" r:id="rId19"/>
+    <p:sldId id="269" r:id="rId20"/>
   </p:sldIdLst>
   <p:sldSz cx="12191695" cy="6858000" type="screen4x3"/>
   <p:notesSz cx="6858000" cy="9144000"/>
@@ -3420,7 +3421,7 @@
                 </a:solidFill>
                 <a:latin typeface="맑은 고딕"/>
               </a:rPr>
-              <a:t>Case 6 · 동기 블로킹 API를 비동기로 리팩터링</a:t>
+              <a:t>Case 5 · 재기동에도 살아남는 OAuth 토큰 생명주기 관리</a:t>
             </a:r>
           </a:p>
         </p:txBody>
@@ -3510,7 +3511,7 @@
                 </a:solidFill>
                 <a:latin typeface="맑은 고딕"/>
               </a:rPr>
-              <a:t>파일 N개를 M초 간격 생성하는 기능에서 (N-1)×M초 동안 브라우저가 그대로 멈춤</a:t>
+              <a:t>장애 알림용 메신저 API는 6시간 액세스 토큰 + 60일 리프레시 토큰(회전 가능) 구조</a:t>
             </a:r>
           </a:p>
         </p:txBody>
@@ -3600,7 +3601,7 @@
                 </a:solidFill>
                 <a:latin typeface="맑은 고딕"/>
               </a:rPr>
-              <a:t>요청 스레드가 생성 루프의 Thread.sleep까지 전부 블로킹한 뒤 응답 — HTTP 체인 전체가 동기로 연결</a:t>
+              <a:t>단순 메모리 보관 시 재기동마다 재인증 필요, 토큰 회전을 놓치면 알림 영구 중단</a:t>
             </a:r>
           </a:p>
         </p:txBody>
@@ -3690,7 +3691,7 @@
                 </a:solidFill>
                 <a:latin typeface="맑은 고딕"/>
               </a:rPr>
-              <a:t>유효성 검증만 동기 처리 후 즉시 '접수됨' 응답, 실제 작업은 백그라운드 스레드풀에 위임</a:t>
+              <a:t>액세스 토큰은 5시간 주기 자동 갱신, 리프레시 토큰은 회전 시마다 파일에 원자적으로 재저장</a:t>
             </a:r>
           </a:p>
         </p:txBody>
@@ -3780,7 +3781,7 @@
                 </a:solidFill>
                 <a:latin typeface="맑은 고딕"/>
               </a:rPr>
-              <a:t>응답시간 수십 초 → 0.2초. '접수됨'과 '완료됨'을 화면에서도 명확히 구분</a:t>
+              <a:t>외부 API 토큰 생명주기는 '재기동돼도 동작하는가'까지 설계에 반영</a:t>
             </a:r>
           </a:p>
         </p:txBody>
@@ -3991,7 +3992,7 @@
                 </a:solidFill>
                 <a:latin typeface="맑은 고딕"/>
               </a:rPr>
-              <a:t>Case 7 · 자체 TCP 프로토콜 기반 파일 릴레이 (제로베이스 설계)</a:t>
+              <a:t>Case 6 · 동기 블로킹 API를 비동기로 리팩터링</a:t>
             </a:r>
           </a:p>
         </p:txBody>
@@ -4081,7 +4082,7 @@
                 </a:solidFill>
                 <a:latin typeface="맑은 고딕"/>
               </a:rPr>
-              <a:t>인스턴스↔중앙서버 양방향 파일 릴레이, 대용량 스트리밍 + pull 방식 수신 필요</a:t>
+              <a:t>파일 N개를 M초 간격 생성하는 기능에서 (N-1)×M초 동안 브라우저가 그대로 멈춤</a:t>
             </a:r>
           </a:p>
         </p:txBody>
@@ -4171,7 +4172,7 @@
                 </a:solidFill>
                 <a:latin typeface="맑은 고딕"/>
               </a:rPr>
-              <a:t>HTTP로도 가능하나 가벼운 자체 프로토콜이 더 적합하다고 판단</a:t>
+              <a:t>요청 스레드가 생성 루프의 Thread.sleep까지 전부 블로킹한 뒤 응답 — HTTP 체인 전체가 동기로 연결</a:t>
             </a:r>
           </a:p>
         </p:txBody>
@@ -4261,7 +4262,7 @@
                 </a:solidFill>
                 <a:latin typeface="맑은 고딕"/>
               </a:rPr>
-              <a:t>1바이트 opType + writeUTF/writeLong 프레이밍, .part 임시파일 후 원자적 rename, 서비스 최초 기동 시 기존 파일을 베이스라인으로 스냅샷해 영구 보호</a:t>
+              <a:t>유효성 검증만 동기 처리 후 즉시 '접수됨' 응답, 실제 작업은 백그라운드 스레드풀에 위임</a:t>
             </a:r>
           </a:p>
         </p:txBody>
@@ -4351,7 +4352,7 @@
                 </a:solidFill>
                 <a:latin typeface="맑은 고딕"/>
               </a:rPr>
-              <a:t>운영 중인 실데이터에 새 자동화를 얹을 땐 최소 영향 원칙을 항상 먼저 고려</a:t>
+              <a:t>응답시간 수십 초 → 0.2초. '접수됨'과 '완료됨'을 화면에서도 명확히 구분</a:t>
             </a:r>
           </a:p>
         </p:txBody>
@@ -4562,7 +4563,7 @@
                 </a:solidFill>
                 <a:latin typeface="맑은 고딕"/>
               </a:rPr>
-              <a:t>기술 스택</a:t>
+              <a:t>Case 7 · 자체 TCP 프로토콜 기반 파일 릴레이 (제로베이스 설계)</a:t>
             </a:r>
           </a:p>
         </p:txBody>
@@ -4575,18 +4576,18 @@
         </p:nvSpPr>
         <p:spPr>
           <a:xfrm>
-            <a:off x="548640" y="1463040"/>
-            <a:ext cx="3566160" cy="502920"/>
+            <a:off x="640080" y="1463040"/>
+            <a:ext cx="1188720" cy="502920"/>
           </a:xfrm>
           <a:prstGeom prst="roundRect">
             <a:avLst/>
           </a:prstGeom>
           <a:solidFill>
-            <a:srgbClr val="1F2937"/>
+            <a:srgbClr val="4A7FD6"/>
           </a:solidFill>
           <a:ln>
             <a:solidFill>
-              <a:srgbClr val="1F2937"/>
+              <a:srgbClr val="4A7FD6"/>
             </a:solidFill>
           </a:ln>
           <a:effectLst/>
@@ -4611,13 +4612,13 @@
           <a:p>
             <a:pPr algn="ctr"/>
             <a:r>
-              <a:rPr sz="1500" b="1">
+              <a:rPr sz="1300" b="1">
                 <a:solidFill>
                   <a:srgbClr val="FFFFFF"/>
                 </a:solidFill>
                 <a:latin typeface="맑은 고딕"/>
               </a:rPr>
-              <a:t>Backend</a:t>
+              <a:t>상황</a:t>
             </a:r>
           </a:p>
         </p:txBody>
@@ -4630,8 +4631,8 @@
         </p:nvSpPr>
         <p:spPr>
           <a:xfrm>
-            <a:off x="548640" y="2103120"/>
-            <a:ext cx="3566160" cy="3657600"/>
+            <a:off x="2011680" y="1444752"/>
+            <a:ext cx="9418320" cy="914400"/>
           </a:xfrm>
           <a:prstGeom prst="rect">
             <a:avLst/>
@@ -4644,99 +4645,15 @@
           </a:bodyPr>
           <a:lstStyle/>
           <a:p>
-            <a:pPr>
-              <a:spcAft>
-                <a:spcPts val="1000"/>
-              </a:spcAft>
-            </a:pPr>
-            <a:r>
-              <a:rPr sz="1300">
+            <a:pPr algn="l"/>
+            <a:r>
+              <a:rPr sz="1500" b="0">
                 <a:solidFill>
                   <a:srgbClr val="1F2937"/>
                 </a:solidFill>
                 <a:latin typeface="맑은 고딕"/>
               </a:rPr>
-              <a:t>•  Java 8 / 21, Spring Boot 2.7</a:t>
-            </a:r>
-          </a:p>
-          <a:p>
-            <a:pPr>
-              <a:spcAft>
-                <a:spcPts val="1000"/>
-              </a:spcAft>
-            </a:pPr>
-            <a:r>
-              <a:rPr sz="1300">
-                <a:solidFill>
-                  <a:srgbClr val="1F2937"/>
-                </a:solidFill>
-                <a:latin typeface="맑은 고딕"/>
-              </a:rPr>
-              <a:t>•  Spring MVC / Security / Data JPA</a:t>
-            </a:r>
-          </a:p>
-          <a:p>
-            <a:pPr>
-              <a:spcAft>
-                <a:spcPts val="1000"/>
-              </a:spcAft>
-            </a:pPr>
-            <a:r>
-              <a:rPr sz="1300">
-                <a:solidFill>
-                  <a:srgbClr val="1F2937"/>
-                </a:solidFill>
-                <a:latin typeface="맑은 고딕"/>
-              </a:rPr>
-              <a:t>•  Thymeleaf</a:t>
-            </a:r>
-          </a:p>
-          <a:p>
-            <a:pPr>
-              <a:spcAft>
-                <a:spcPts val="1000"/>
-              </a:spcAft>
-            </a:pPr>
-            <a:r>
-              <a:rPr sz="1300">
-                <a:solidFill>
-                  <a:srgbClr val="1F2937"/>
-                </a:solidFill>
-                <a:latin typeface="맑은 고딕"/>
-              </a:rPr>
-              <a:t>•  REST API (API Key 인증)</a:t>
-            </a:r>
-          </a:p>
-          <a:p>
-            <a:pPr>
-              <a:spcAft>
-                <a:spcPts val="1000"/>
-              </a:spcAft>
-            </a:pPr>
-            <a:r>
-              <a:rPr sz="1300">
-                <a:solidFill>
-                  <a:srgbClr val="1F2937"/>
-                </a:solidFill>
-                <a:latin typeface="맑은 고딕"/>
-              </a:rPr>
-              <a:t>•  Raw TCP 소켓 프로그래밍</a:t>
-            </a:r>
-          </a:p>
-          <a:p>
-            <a:pPr>
-              <a:spcAft>
-                <a:spcPts val="1000"/>
-              </a:spcAft>
-            </a:pPr>
-            <a:r>
-              <a:rPr sz="1300">
-                <a:solidFill>
-                  <a:srgbClr val="1F2937"/>
-                </a:solidFill>
-                <a:latin typeface="맑은 고딕"/>
-              </a:rPr>
-              <a:t>•  ExecutorService / @Scheduled 비동기</a:t>
+              <a:t>인스턴스↔중앙서버 양방향 파일 릴레이, 대용량 스트리밍 + pull 방식 수신 필요</a:t>
             </a:r>
           </a:p>
         </p:txBody>
@@ -4749,18 +4666,18 @@
         </p:nvSpPr>
         <p:spPr>
           <a:xfrm>
-            <a:off x="4251960" y="1463040"/>
-            <a:ext cx="3566160" cy="502920"/>
+            <a:off x="640080" y="2514600"/>
+            <a:ext cx="1188720" cy="502920"/>
           </a:xfrm>
           <a:prstGeom prst="roundRect">
             <a:avLst/>
           </a:prstGeom>
           <a:solidFill>
-            <a:srgbClr val="1F2937"/>
+            <a:srgbClr val="D64545"/>
           </a:solidFill>
           <a:ln>
             <a:solidFill>
-              <a:srgbClr val="1F2937"/>
+              <a:srgbClr val="D64545"/>
             </a:solidFill>
           </a:ln>
           <a:effectLst/>
@@ -4785,13 +4702,13 @@
           <a:p>
             <a:pPr algn="ctr"/>
             <a:r>
-              <a:rPr sz="1500" b="1">
+              <a:rPr sz="1300" b="1">
                 <a:solidFill>
                   <a:srgbClr val="FFFFFF"/>
                 </a:solidFill>
                 <a:latin typeface="맑은 고딕"/>
               </a:rPr>
-              <a:t>인프라 · 운영</a:t>
+              <a:t>원인</a:t>
             </a:r>
           </a:p>
         </p:txBody>
@@ -4804,8 +4721,8 @@
         </p:nvSpPr>
         <p:spPr>
           <a:xfrm>
-            <a:off x="4251960" y="2103120"/>
-            <a:ext cx="3566160" cy="3657600"/>
+            <a:off x="2011680" y="2496312"/>
+            <a:ext cx="9418320" cy="914400"/>
           </a:xfrm>
           <a:prstGeom prst="rect">
             <a:avLst/>
@@ -4818,83 +4735,15 @@
           </a:bodyPr>
           <a:lstStyle/>
           <a:p>
-            <a:pPr>
-              <a:spcAft>
-                <a:spcPts val="1000"/>
-              </a:spcAft>
-            </a:pPr>
-            <a:r>
-              <a:rPr sz="1300">
+            <a:pPr algn="l"/>
+            <a:r>
+              <a:rPr sz="1500" b="0">
                 <a:solidFill>
                   <a:srgbClr val="1F2937"/>
                 </a:solidFill>
                 <a:latin typeface="맑은 고딕"/>
               </a:rPr>
-              <a:t>•  Docker / Docker Compose</a:t>
-            </a:r>
-          </a:p>
-          <a:p>
-            <a:pPr>
-              <a:spcAft>
-                <a:spcPts val="1000"/>
-              </a:spcAft>
-            </a:pPr>
-            <a:r>
-              <a:rPr sz="1300">
-                <a:solidFill>
-                  <a:srgbClr val="1F2937"/>
-                </a:solidFill>
-                <a:latin typeface="맑은 고딕"/>
-              </a:rPr>
-              <a:t>•  사설 컨테이너 레지스트리</a:t>
-            </a:r>
-          </a:p>
-          <a:p>
-            <a:pPr>
-              <a:spcAft>
-                <a:spcPts val="1000"/>
-              </a:spcAft>
-            </a:pPr>
-            <a:r>
-              <a:rPr sz="1300">
-                <a:solidFill>
-                  <a:srgbClr val="1F2937"/>
-                </a:solidFill>
-                <a:latin typeface="맑은 고딕"/>
-              </a:rPr>
-              <a:t>•  Linux(CentOS), systemd, cron</a:t>
-            </a:r>
-          </a:p>
-          <a:p>
-            <a:pPr>
-              <a:spcAft>
-                <a:spcPts val="1000"/>
-              </a:spcAft>
-            </a:pPr>
-            <a:r>
-              <a:rPr sz="1300">
-                <a:solidFill>
-                  <a:srgbClr val="1F2937"/>
-                </a:solidFill>
-                <a:latin typeface="맑은 고딕"/>
-              </a:rPr>
-              <a:t>•  LVM/XFS, firewalld</a:t>
-            </a:r>
-          </a:p>
-          <a:p>
-            <a:pPr>
-              <a:spcAft>
-                <a:spcPts val="1000"/>
-              </a:spcAft>
-            </a:pPr>
-            <a:r>
-              <a:rPr sz="1300">
-                <a:solidFill>
-                  <a:srgbClr val="1F2937"/>
-                </a:solidFill>
-                <a:latin typeface="맑은 고딕"/>
-              </a:rPr>
-              <a:t>•  MariaDB</a:t>
+              <a:t>HTTP로도 가능하나 가벼운 자체 프로토콜이 더 적합하다고 판단</a:t>
             </a:r>
           </a:p>
         </p:txBody>
@@ -4907,18 +4756,18 @@
         </p:nvSpPr>
         <p:spPr>
           <a:xfrm>
-            <a:off x="7955280" y="1463040"/>
-            <a:ext cx="3566160" cy="502920"/>
+            <a:off x="640080" y="3566160"/>
+            <a:ext cx="1188720" cy="502920"/>
           </a:xfrm>
           <a:prstGeom prst="roundRect">
             <a:avLst/>
           </a:prstGeom>
           <a:solidFill>
-            <a:srgbClr val="1F2937"/>
+            <a:srgbClr val="1E7A34"/>
           </a:solidFill>
           <a:ln>
             <a:solidFill>
-              <a:srgbClr val="1F2937"/>
+              <a:srgbClr val="1E7A34"/>
             </a:solidFill>
           </a:ln>
           <a:effectLst/>
@@ -4943,13 +4792,13 @@
           <a:p>
             <a:pPr algn="ctr"/>
             <a:r>
-              <a:rPr sz="1500" b="1">
+              <a:rPr sz="1300" b="1">
                 <a:solidFill>
                   <a:srgbClr val="FFFFFF"/>
                 </a:solidFill>
                 <a:latin typeface="맑은 고딕"/>
               </a:rPr>
-              <a:t>모니터링 · 연동</a:t>
+              <a:t>해결</a:t>
             </a:r>
           </a:p>
         </p:txBody>
@@ -4962,8 +4811,8 @@
         </p:nvSpPr>
         <p:spPr>
           <a:xfrm>
-            <a:off x="7955280" y="2103120"/>
-            <a:ext cx="3566160" cy="3657600"/>
+            <a:off x="2011680" y="3547872"/>
+            <a:ext cx="9418320" cy="914400"/>
           </a:xfrm>
           <a:prstGeom prst="rect">
             <a:avLst/>
@@ -4976,97 +4825,84 @@
           </a:bodyPr>
           <a:lstStyle/>
           <a:p>
-            <a:pPr>
-              <a:spcAft>
-                <a:spcPts val="1000"/>
-              </a:spcAft>
-            </a:pPr>
-            <a:r>
-              <a:rPr sz="1300">
+            <a:pPr algn="l"/>
+            <a:r>
+              <a:rPr sz="1500" b="0">
                 <a:solidFill>
                   <a:srgbClr val="1F2937"/>
                 </a:solidFill>
                 <a:latin typeface="맑은 고딕"/>
               </a:rPr>
-              <a:t>•  Prometheus (PromQL)</a:t>
-            </a:r>
-          </a:p>
-          <a:p>
-            <a:pPr>
-              <a:spcAft>
-                <a:spcPts val="1000"/>
-              </a:spcAft>
-            </a:pPr>
-            <a:r>
-              <a:rPr sz="1300">
-                <a:solidFill>
-                  <a:srgbClr val="1F2937"/>
-                </a:solidFill>
-                <a:latin typeface="맑은 고딕"/>
-              </a:rPr>
-              <a:t>•  Grafana (대시보드/API)</a:t>
-            </a:r>
-          </a:p>
-          <a:p>
-            <a:pPr>
-              <a:spcAft>
-                <a:spcPts val="1000"/>
-              </a:spcAft>
-            </a:pPr>
-            <a:r>
-              <a:rPr sz="1300">
-                <a:solidFill>
-                  <a:srgbClr val="1F2937"/>
-                </a:solidFill>
-                <a:latin typeface="맑은 고딕"/>
-              </a:rPr>
-              <a:t>•  cAdvisor, node_exporter</a:t>
-            </a:r>
-          </a:p>
-          <a:p>
-            <a:pPr>
-              <a:spcAft>
-                <a:spcPts val="1000"/>
-              </a:spcAft>
-            </a:pPr>
-            <a:r>
-              <a:rPr sz="1300">
-                <a:solidFill>
-                  <a:srgbClr val="1F2937"/>
-                </a:solidFill>
-                <a:latin typeface="맑은 고딕"/>
-              </a:rPr>
-              <a:t>•  OAuth2 스타일 토큰 연동</a:t>
-            </a:r>
-          </a:p>
-          <a:p>
-            <a:pPr>
-              <a:spcAft>
-                <a:spcPts val="1000"/>
-              </a:spcAft>
-            </a:pPr>
-            <a:r>
-              <a:rPr sz="1300">
-                <a:solidFill>
-                  <a:srgbClr val="1F2937"/>
-                </a:solidFill>
-                <a:latin typeface="맑은 고딕"/>
-              </a:rPr>
-              <a:t>•  외부 메신저 알림 API</a:t>
-            </a:r>
-          </a:p>
-        </p:txBody>
-      </p:sp>
-      <p:sp>
-        <p:nvSpPr>
-          <p:cNvPr id="11" name="TextBox 10"/>
+              <a:t>1바이트 opType + writeUTF/writeLong 프레이밍, .part 임시파일 후 원자적 rename, 서비스 최초 기동 시 기존 파일을 베이스라인으로 스냅샷해 영구 보호</a:t>
+            </a:r>
+          </a:p>
+        </p:txBody>
+      </p:sp>
+      <p:sp>
+        <p:nvSpPr>
+          <p:cNvPr id="11" name="Rounded Rectangle 10"/>
+          <p:cNvSpPr/>
+          <p:nvPr/>
+        </p:nvSpPr>
+        <p:spPr>
+          <a:xfrm>
+            <a:off x="640080" y="4617720"/>
+            <a:ext cx="1188720" cy="502920"/>
+          </a:xfrm>
+          <a:prstGeom prst="roundRect">
+            <a:avLst/>
+          </a:prstGeom>
+          <a:solidFill>
+            <a:srgbClr val="7C3AED"/>
+          </a:solidFill>
+          <a:ln>
+            <a:solidFill>
+              <a:srgbClr val="7C3AED"/>
+            </a:solidFill>
+          </a:ln>
+          <a:effectLst/>
+        </p:spPr>
+        <p:style>
+          <a:lnRef idx="1">
+            <a:schemeClr val="accent1"/>
+          </a:lnRef>
+          <a:fillRef idx="3">
+            <a:schemeClr val="accent1"/>
+          </a:fillRef>
+          <a:effectRef idx="2">
+            <a:schemeClr val="accent1"/>
+          </a:effectRef>
+          <a:fontRef idx="minor">
+            <a:schemeClr val="lt1"/>
+          </a:fontRef>
+        </p:style>
+        <p:txBody>
+          <a:bodyPr rtlCol="0" anchor="ctr" wrap="square"/>
+          <a:lstStyle/>
+          <a:p>
+            <a:pPr algn="ctr"/>
+            <a:r>
+              <a:rPr sz="1300" b="1">
+                <a:solidFill>
+                  <a:srgbClr val="FFFFFF"/>
+                </a:solidFill>
+                <a:latin typeface="맑은 고딕"/>
+              </a:rPr>
+              <a:t>배운 점</a:t>
+            </a:r>
+          </a:p>
+        </p:txBody>
+      </p:sp>
+      <p:sp>
+        <p:nvSpPr>
+          <p:cNvPr id="12" name="TextBox 11"/>
           <p:cNvSpPr txBox="1"/>
           <p:nvPr/>
         </p:nvSpPr>
         <p:spPr>
           <a:xfrm>
-            <a:off x="457200" y="6473952"/>
-            <a:ext cx="5486400" cy="320040"/>
+            <a:off x="2011680" y="4599432"/>
+            <a:ext cx="9418320" cy="914400"/>
           </a:xfrm>
           <a:prstGeom prst="rect">
             <a:avLst/>
@@ -5081,6 +4917,41 @@
           <a:p>
             <a:pPr algn="l"/>
             <a:r>
+              <a:rPr sz="1500" b="0">
+                <a:solidFill>
+                  <a:srgbClr val="1F2937"/>
+                </a:solidFill>
+                <a:latin typeface="맑은 고딕"/>
+              </a:rPr>
+              <a:t>운영 중인 실데이터에 새 자동화를 얹을 땐 최소 영향 원칙을 항상 먼저 고려</a:t>
+            </a:r>
+          </a:p>
+        </p:txBody>
+      </p:sp>
+      <p:sp>
+        <p:nvSpPr>
+          <p:cNvPr id="13" name="TextBox 12"/>
+          <p:cNvSpPr txBox="1"/>
+          <p:nvPr/>
+        </p:nvSpPr>
+        <p:spPr>
+          <a:xfrm>
+            <a:off x="457200" y="6473952"/>
+            <a:ext cx="5486400" cy="320040"/>
+          </a:xfrm>
+          <a:prstGeom prst="rect">
+            <a:avLst/>
+          </a:prstGeom>
+          <a:noFill/>
+        </p:spPr>
+        <p:txBody>
+          <a:bodyPr wrap="square">
+            <a:spAutoFit/>
+          </a:bodyPr>
+          <a:lstStyle/>
+          <a:p>
+            <a:pPr algn="l"/>
+            <a:r>
               <a:rPr sz="1000" b="0">
                 <a:solidFill>
                   <a:srgbClr val="999999"/>
@@ -5094,7 +4965,7 @@
       </p:sp>
       <p:sp>
         <p:nvSpPr>
-          <p:cNvPr id="12" name="TextBox 11"/>
+          <p:cNvPr id="14" name="TextBox 13"/>
           <p:cNvSpPr txBox="1"/>
           <p:nvPr/>
         </p:nvSpPr>
@@ -5160,6 +5031,50 @@
             <a:avLst/>
           </a:prstGeom>
           <a:solidFill>
+            <a:srgbClr val="FFFFFF"/>
+          </a:solidFill>
+          <a:ln>
+            <a:noFill/>
+          </a:ln>
+          <a:effectLst/>
+        </p:spPr>
+        <p:style>
+          <a:lnRef idx="1">
+            <a:schemeClr val="accent1"/>
+          </a:lnRef>
+          <a:fillRef idx="3">
+            <a:schemeClr val="accent1"/>
+          </a:fillRef>
+          <a:effectRef idx="2">
+            <a:schemeClr val="accent1"/>
+          </a:effectRef>
+          <a:fontRef idx="minor">
+            <a:schemeClr val="lt1"/>
+          </a:fontRef>
+        </p:style>
+        <p:txBody>
+          <a:bodyPr rtlCol="0" anchor="ctr"/>
+          <a:lstStyle/>
+          <a:p>
+            <a:pPr algn="ctr"/>
+          </a:p>
+        </p:txBody>
+      </p:sp>
+      <p:sp>
+        <p:nvSpPr>
+          <p:cNvPr id="3" name="Rectangle 2"/>
+          <p:cNvSpPr/>
+          <p:nvPr/>
+        </p:nvSpPr>
+        <p:spPr>
+          <a:xfrm>
+            <a:off x="0" y="0"/>
+            <a:ext cx="12191695" cy="1051560"/>
+          </a:xfrm>
+          <a:prstGeom prst="rect">
+            <a:avLst/>
+          </a:prstGeom>
+          <a:solidFill>
             <a:srgbClr val="1F2937"/>
           </a:solidFill>
           <a:ln>
@@ -5191,14 +5106,14 @@
       </p:sp>
       <p:sp>
         <p:nvSpPr>
-          <p:cNvPr id="3" name="TextBox 2"/>
+          <p:cNvPr id="4" name="TextBox 3"/>
           <p:cNvSpPr txBox="1"/>
           <p:nvPr/>
         </p:nvSpPr>
         <p:spPr>
           <a:xfrm>
-            <a:off x="914400" y="2743200"/>
-            <a:ext cx="10332720" cy="914400"/>
+            <a:off x="457200" y="164592"/>
+            <a:ext cx="11247120" cy="548640"/>
           </a:xfrm>
           <a:prstGeom prst="rect">
             <a:avLst/>
@@ -5213,27 +5128,82 @@
           <a:p>
             <a:pPr algn="l"/>
             <a:r>
-              <a:rPr sz="3600" b="1">
+              <a:rPr sz="2600" b="1">
                 <a:solidFill>
                   <a:srgbClr val="FFFFFF"/>
                 </a:solidFill>
                 <a:latin typeface="맑은 고딕"/>
               </a:rPr>
-              <a:t>감사합니다</a:t>
-            </a:r>
-          </a:p>
-        </p:txBody>
-      </p:sp>
-      <p:sp>
-        <p:nvSpPr>
-          <p:cNvPr id="4" name="TextBox 3"/>
+              <a:t>기술 스택</a:t>
+            </a:r>
+          </a:p>
+        </p:txBody>
+      </p:sp>
+      <p:sp>
+        <p:nvSpPr>
+          <p:cNvPr id="5" name="Rounded Rectangle 4"/>
+          <p:cNvSpPr/>
+          <p:nvPr/>
+        </p:nvSpPr>
+        <p:spPr>
+          <a:xfrm>
+            <a:off x="548640" y="1463040"/>
+            <a:ext cx="3566160" cy="502920"/>
+          </a:xfrm>
+          <a:prstGeom prst="roundRect">
+            <a:avLst/>
+          </a:prstGeom>
+          <a:solidFill>
+            <a:srgbClr val="1F2937"/>
+          </a:solidFill>
+          <a:ln>
+            <a:solidFill>
+              <a:srgbClr val="1F2937"/>
+            </a:solidFill>
+          </a:ln>
+          <a:effectLst/>
+        </p:spPr>
+        <p:style>
+          <a:lnRef idx="1">
+            <a:schemeClr val="accent1"/>
+          </a:lnRef>
+          <a:fillRef idx="3">
+            <a:schemeClr val="accent1"/>
+          </a:fillRef>
+          <a:effectRef idx="2">
+            <a:schemeClr val="accent1"/>
+          </a:effectRef>
+          <a:fontRef idx="minor">
+            <a:schemeClr val="lt1"/>
+          </a:fontRef>
+        </p:style>
+        <p:txBody>
+          <a:bodyPr rtlCol="0" anchor="ctr" wrap="square"/>
+          <a:lstStyle/>
+          <a:p>
+            <a:pPr algn="ctr"/>
+            <a:r>
+              <a:rPr sz="1500" b="1">
+                <a:solidFill>
+                  <a:srgbClr val="FFFFFF"/>
+                </a:solidFill>
+                <a:latin typeface="맑은 고딕"/>
+              </a:rPr>
+              <a:t>Backend</a:t>
+            </a:r>
+          </a:p>
+        </p:txBody>
+      </p:sp>
+      <p:sp>
+        <p:nvSpPr>
+          <p:cNvPr id="6" name="TextBox 5"/>
           <p:cNvSpPr txBox="1"/>
           <p:nvPr/>
         </p:nvSpPr>
         <p:spPr>
           <a:xfrm>
-            <a:off x="914400" y="3566160"/>
-            <a:ext cx="10332720" cy="731520"/>
+            <a:off x="548640" y="2103120"/>
+            <a:ext cx="3566160" cy="3657600"/>
           </a:xfrm>
           <a:prstGeom prst="rect">
             <a:avLst/>
@@ -5246,29 +5216,168 @@
           </a:bodyPr>
           <a:lstStyle/>
           <a:p>
-            <a:pPr algn="l"/>
-            <a:r>
-              <a:rPr sz="1500" b="0">
-                <a:solidFill>
-                  <a:srgbClr val="CBD5E1"/>
-                </a:solidFill>
-                <a:latin typeface="맑은 고딕"/>
-              </a:rPr>
-              <a:t>설계부터 운영/트러블슈팅까지 전 과정을 직접 수행한 경험을 담았습니다.</a:t>
-            </a:r>
-          </a:p>
-        </p:txBody>
-      </p:sp>
-      <p:sp>
-        <p:nvSpPr>
-          <p:cNvPr id="5" name="TextBox 4"/>
+            <a:pPr>
+              <a:spcAft>
+                <a:spcPts val="1000"/>
+              </a:spcAft>
+            </a:pPr>
+            <a:r>
+              <a:rPr sz="1300">
+                <a:solidFill>
+                  <a:srgbClr val="1F2937"/>
+                </a:solidFill>
+                <a:latin typeface="맑은 고딕"/>
+              </a:rPr>
+              <a:t>•  Java 8 / 21, Spring Boot 2.7</a:t>
+            </a:r>
+          </a:p>
+          <a:p>
+            <a:pPr>
+              <a:spcAft>
+                <a:spcPts val="1000"/>
+              </a:spcAft>
+            </a:pPr>
+            <a:r>
+              <a:rPr sz="1300">
+                <a:solidFill>
+                  <a:srgbClr val="1F2937"/>
+                </a:solidFill>
+                <a:latin typeface="맑은 고딕"/>
+              </a:rPr>
+              <a:t>•  Spring MVC / Security / Data JPA</a:t>
+            </a:r>
+          </a:p>
+          <a:p>
+            <a:pPr>
+              <a:spcAft>
+                <a:spcPts val="1000"/>
+              </a:spcAft>
+            </a:pPr>
+            <a:r>
+              <a:rPr sz="1300">
+                <a:solidFill>
+                  <a:srgbClr val="1F2937"/>
+                </a:solidFill>
+                <a:latin typeface="맑은 고딕"/>
+              </a:rPr>
+              <a:t>•  Thymeleaf</a:t>
+            </a:r>
+          </a:p>
+          <a:p>
+            <a:pPr>
+              <a:spcAft>
+                <a:spcPts val="1000"/>
+              </a:spcAft>
+            </a:pPr>
+            <a:r>
+              <a:rPr sz="1300">
+                <a:solidFill>
+                  <a:srgbClr val="1F2937"/>
+                </a:solidFill>
+                <a:latin typeface="맑은 고딕"/>
+              </a:rPr>
+              <a:t>•  REST API (API Key 인증)</a:t>
+            </a:r>
+          </a:p>
+          <a:p>
+            <a:pPr>
+              <a:spcAft>
+                <a:spcPts val="1000"/>
+              </a:spcAft>
+            </a:pPr>
+            <a:r>
+              <a:rPr sz="1300">
+                <a:solidFill>
+                  <a:srgbClr val="1F2937"/>
+                </a:solidFill>
+                <a:latin typeface="맑은 고딕"/>
+              </a:rPr>
+              <a:t>•  Raw TCP 소켓 프로그래밍</a:t>
+            </a:r>
+          </a:p>
+          <a:p>
+            <a:pPr>
+              <a:spcAft>
+                <a:spcPts val="1000"/>
+              </a:spcAft>
+            </a:pPr>
+            <a:r>
+              <a:rPr sz="1300">
+                <a:solidFill>
+                  <a:srgbClr val="1F2937"/>
+                </a:solidFill>
+                <a:latin typeface="맑은 고딕"/>
+              </a:rPr>
+              <a:t>•  ExecutorService / @Scheduled 비동기</a:t>
+            </a:r>
+          </a:p>
+        </p:txBody>
+      </p:sp>
+      <p:sp>
+        <p:nvSpPr>
+          <p:cNvPr id="7" name="Rounded Rectangle 6"/>
+          <p:cNvSpPr/>
+          <p:nvPr/>
+        </p:nvSpPr>
+        <p:spPr>
+          <a:xfrm>
+            <a:off x="4251960" y="1463040"/>
+            <a:ext cx="3566160" cy="502920"/>
+          </a:xfrm>
+          <a:prstGeom prst="roundRect">
+            <a:avLst/>
+          </a:prstGeom>
+          <a:solidFill>
+            <a:srgbClr val="1F2937"/>
+          </a:solidFill>
+          <a:ln>
+            <a:solidFill>
+              <a:srgbClr val="1F2937"/>
+            </a:solidFill>
+          </a:ln>
+          <a:effectLst/>
+        </p:spPr>
+        <p:style>
+          <a:lnRef idx="1">
+            <a:schemeClr val="accent1"/>
+          </a:lnRef>
+          <a:fillRef idx="3">
+            <a:schemeClr val="accent1"/>
+          </a:fillRef>
+          <a:effectRef idx="2">
+            <a:schemeClr val="accent1"/>
+          </a:effectRef>
+          <a:fontRef idx="minor">
+            <a:schemeClr val="lt1"/>
+          </a:fontRef>
+        </p:style>
+        <p:txBody>
+          <a:bodyPr rtlCol="0" anchor="ctr" wrap="square"/>
+          <a:lstStyle/>
+          <a:p>
+            <a:pPr algn="ctr"/>
+            <a:r>
+              <a:rPr sz="1500" b="1">
+                <a:solidFill>
+                  <a:srgbClr val="FFFFFF"/>
+                </a:solidFill>
+                <a:latin typeface="맑은 고딕"/>
+              </a:rPr>
+              <a:t>인프라 · 운영</a:t>
+            </a:r>
+          </a:p>
+        </p:txBody>
+      </p:sp>
+      <p:sp>
+        <p:nvSpPr>
+          <p:cNvPr id="8" name="TextBox 7"/>
           <p:cNvSpPr txBox="1"/>
           <p:nvPr/>
         </p:nvSpPr>
         <p:spPr>
           <a:xfrm>
-            <a:off x="457200" y="6473952"/>
-            <a:ext cx="5486400" cy="320040"/>
+            <a:off x="4251960" y="2103120"/>
+            <a:ext cx="3566160" cy="3657600"/>
           </a:xfrm>
           <a:prstGeom prst="rect">
             <a:avLst/>
@@ -5281,29 +5390,152 @@
           </a:bodyPr>
           <a:lstStyle/>
           <a:p>
-            <a:pPr algn="l"/>
-            <a:r>
-              <a:rPr sz="1000" b="0">
-                <a:solidFill>
-                  <a:srgbClr val="999999"/>
-                </a:solidFill>
-                <a:latin typeface="맑은 고딕"/>
-              </a:rPr>
-              <a:t>컨테이너 오케스트레이션 &amp; 통합 관제 플랫폼</a:t>
-            </a:r>
-          </a:p>
-        </p:txBody>
-      </p:sp>
-      <p:sp>
-        <p:nvSpPr>
-          <p:cNvPr id="6" name="TextBox 5"/>
+            <a:pPr>
+              <a:spcAft>
+                <a:spcPts val="1000"/>
+              </a:spcAft>
+            </a:pPr>
+            <a:r>
+              <a:rPr sz="1300">
+                <a:solidFill>
+                  <a:srgbClr val="1F2937"/>
+                </a:solidFill>
+                <a:latin typeface="맑은 고딕"/>
+              </a:rPr>
+              <a:t>•  Docker / Docker Compose</a:t>
+            </a:r>
+          </a:p>
+          <a:p>
+            <a:pPr>
+              <a:spcAft>
+                <a:spcPts val="1000"/>
+              </a:spcAft>
+            </a:pPr>
+            <a:r>
+              <a:rPr sz="1300">
+                <a:solidFill>
+                  <a:srgbClr val="1F2937"/>
+                </a:solidFill>
+                <a:latin typeface="맑은 고딕"/>
+              </a:rPr>
+              <a:t>•  사설 컨테이너 레지스트리</a:t>
+            </a:r>
+          </a:p>
+          <a:p>
+            <a:pPr>
+              <a:spcAft>
+                <a:spcPts val="1000"/>
+              </a:spcAft>
+            </a:pPr>
+            <a:r>
+              <a:rPr sz="1300">
+                <a:solidFill>
+                  <a:srgbClr val="1F2937"/>
+                </a:solidFill>
+                <a:latin typeface="맑은 고딕"/>
+              </a:rPr>
+              <a:t>•  Linux(CentOS), systemd, cron</a:t>
+            </a:r>
+          </a:p>
+          <a:p>
+            <a:pPr>
+              <a:spcAft>
+                <a:spcPts val="1000"/>
+              </a:spcAft>
+            </a:pPr>
+            <a:r>
+              <a:rPr sz="1300">
+                <a:solidFill>
+                  <a:srgbClr val="1F2937"/>
+                </a:solidFill>
+                <a:latin typeface="맑은 고딕"/>
+              </a:rPr>
+              <a:t>•  LVM/XFS, firewalld</a:t>
+            </a:r>
+          </a:p>
+          <a:p>
+            <a:pPr>
+              <a:spcAft>
+                <a:spcPts val="1000"/>
+              </a:spcAft>
+            </a:pPr>
+            <a:r>
+              <a:rPr sz="1300">
+                <a:solidFill>
+                  <a:srgbClr val="1F2937"/>
+                </a:solidFill>
+                <a:latin typeface="맑은 고딕"/>
+              </a:rPr>
+              <a:t>•  MariaDB</a:t>
+            </a:r>
+          </a:p>
+        </p:txBody>
+      </p:sp>
+      <p:sp>
+        <p:nvSpPr>
+          <p:cNvPr id="9" name="Rounded Rectangle 8"/>
+          <p:cNvSpPr/>
+          <p:nvPr/>
+        </p:nvSpPr>
+        <p:spPr>
+          <a:xfrm>
+            <a:off x="7955280" y="1463040"/>
+            <a:ext cx="3566160" cy="502920"/>
+          </a:xfrm>
+          <a:prstGeom prst="roundRect">
+            <a:avLst/>
+          </a:prstGeom>
+          <a:solidFill>
+            <a:srgbClr val="1F2937"/>
+          </a:solidFill>
+          <a:ln>
+            <a:solidFill>
+              <a:srgbClr val="1F2937"/>
+            </a:solidFill>
+          </a:ln>
+          <a:effectLst/>
+        </p:spPr>
+        <p:style>
+          <a:lnRef idx="1">
+            <a:schemeClr val="accent1"/>
+          </a:lnRef>
+          <a:fillRef idx="3">
+            <a:schemeClr val="accent1"/>
+          </a:fillRef>
+          <a:effectRef idx="2">
+            <a:schemeClr val="accent1"/>
+          </a:effectRef>
+          <a:fontRef idx="minor">
+            <a:schemeClr val="lt1"/>
+          </a:fontRef>
+        </p:style>
+        <p:txBody>
+          <a:bodyPr rtlCol="0" anchor="ctr" wrap="square"/>
+          <a:lstStyle/>
+          <a:p>
+            <a:pPr algn="ctr"/>
+            <a:r>
+              <a:rPr sz="1500" b="1">
+                <a:solidFill>
+                  <a:srgbClr val="FFFFFF"/>
+                </a:solidFill>
+                <a:latin typeface="맑은 고딕"/>
+              </a:rPr>
+              <a:t>모니터링 · 연동</a:t>
+            </a:r>
+          </a:p>
+        </p:txBody>
+      </p:sp>
+      <p:sp>
+        <p:nvSpPr>
+          <p:cNvPr id="10" name="TextBox 9"/>
           <p:cNvSpPr txBox="1"/>
           <p:nvPr/>
         </p:nvSpPr>
         <p:spPr>
           <a:xfrm>
-            <a:off x="11247120" y="6473952"/>
-            <a:ext cx="640080" cy="320040"/>
+            <a:off x="7955280" y="2103120"/>
+            <a:ext cx="3566160" cy="3657600"/>
           </a:xfrm>
           <a:prstGeom prst="rect">
             <a:avLst/>
@@ -5316,6 +5548,144 @@
           </a:bodyPr>
           <a:lstStyle/>
           <a:p>
+            <a:pPr>
+              <a:spcAft>
+                <a:spcPts val="1000"/>
+              </a:spcAft>
+            </a:pPr>
+            <a:r>
+              <a:rPr sz="1300">
+                <a:solidFill>
+                  <a:srgbClr val="1F2937"/>
+                </a:solidFill>
+                <a:latin typeface="맑은 고딕"/>
+              </a:rPr>
+              <a:t>•  Prometheus (PromQL)</a:t>
+            </a:r>
+          </a:p>
+          <a:p>
+            <a:pPr>
+              <a:spcAft>
+                <a:spcPts val="1000"/>
+              </a:spcAft>
+            </a:pPr>
+            <a:r>
+              <a:rPr sz="1300">
+                <a:solidFill>
+                  <a:srgbClr val="1F2937"/>
+                </a:solidFill>
+                <a:latin typeface="맑은 고딕"/>
+              </a:rPr>
+              <a:t>•  Grafana (대시보드/API)</a:t>
+            </a:r>
+          </a:p>
+          <a:p>
+            <a:pPr>
+              <a:spcAft>
+                <a:spcPts val="1000"/>
+              </a:spcAft>
+            </a:pPr>
+            <a:r>
+              <a:rPr sz="1300">
+                <a:solidFill>
+                  <a:srgbClr val="1F2937"/>
+                </a:solidFill>
+                <a:latin typeface="맑은 고딕"/>
+              </a:rPr>
+              <a:t>•  cAdvisor, node_exporter</a:t>
+            </a:r>
+          </a:p>
+          <a:p>
+            <a:pPr>
+              <a:spcAft>
+                <a:spcPts val="1000"/>
+              </a:spcAft>
+            </a:pPr>
+            <a:r>
+              <a:rPr sz="1300">
+                <a:solidFill>
+                  <a:srgbClr val="1F2937"/>
+                </a:solidFill>
+                <a:latin typeface="맑은 고딕"/>
+              </a:rPr>
+              <a:t>•  OAuth2 스타일 토큰 연동</a:t>
+            </a:r>
+          </a:p>
+          <a:p>
+            <a:pPr>
+              <a:spcAft>
+                <a:spcPts val="1000"/>
+              </a:spcAft>
+            </a:pPr>
+            <a:r>
+              <a:rPr sz="1300">
+                <a:solidFill>
+                  <a:srgbClr val="1F2937"/>
+                </a:solidFill>
+                <a:latin typeface="맑은 고딕"/>
+              </a:rPr>
+              <a:t>•  외부 메신저 알림 API</a:t>
+            </a:r>
+          </a:p>
+        </p:txBody>
+      </p:sp>
+      <p:sp>
+        <p:nvSpPr>
+          <p:cNvPr id="11" name="TextBox 10"/>
+          <p:cNvSpPr txBox="1"/>
+          <p:nvPr/>
+        </p:nvSpPr>
+        <p:spPr>
+          <a:xfrm>
+            <a:off x="457200" y="6473952"/>
+            <a:ext cx="5486400" cy="320040"/>
+          </a:xfrm>
+          <a:prstGeom prst="rect">
+            <a:avLst/>
+          </a:prstGeom>
+          <a:noFill/>
+        </p:spPr>
+        <p:txBody>
+          <a:bodyPr wrap="square">
+            <a:spAutoFit/>
+          </a:bodyPr>
+          <a:lstStyle/>
+          <a:p>
+            <a:pPr algn="l"/>
+            <a:r>
+              <a:rPr sz="1000" b="0">
+                <a:solidFill>
+                  <a:srgbClr val="999999"/>
+                </a:solidFill>
+                <a:latin typeface="맑은 고딕"/>
+              </a:rPr>
+              <a:t>컨테이너 오케스트레이션 &amp; 통합 관제 플랫폼</a:t>
+            </a:r>
+          </a:p>
+        </p:txBody>
+      </p:sp>
+      <p:sp>
+        <p:nvSpPr>
+          <p:cNvPr id="12" name="TextBox 11"/>
+          <p:cNvSpPr txBox="1"/>
+          <p:nvPr/>
+        </p:nvSpPr>
+        <p:spPr>
+          <a:xfrm>
+            <a:off x="11247120" y="6473952"/>
+            <a:ext cx="640080" cy="320040"/>
+          </a:xfrm>
+          <a:prstGeom prst="rect">
+            <a:avLst/>
+          </a:prstGeom>
+          <a:noFill/>
+        </p:spPr>
+        <p:txBody>
+          <a:bodyPr wrap="square">
+            <a:spAutoFit/>
+          </a:bodyPr>
+          <a:lstStyle/>
+          <a:p>
             <a:pPr algn="r"/>
             <a:r>
               <a:rPr sz="1000" b="0">
@@ -5325,6 +5695,208 @@
                 <a:latin typeface="맑은 고딕"/>
               </a:rPr>
               <a:t>13</a:t>
+            </a:r>
+          </a:p>
+        </p:txBody>
+      </p:sp>
+    </p:spTree>
+  </p:cSld>
+  <p:clrMapOvr>
+    <a:masterClrMapping/>
+  </p:clrMapOvr>
+</p:sld>
+</file>
+
+<file path=ppt/slides/slide14.xml><?xml version="1.0" encoding="utf-8"?>
+<p:sld xmlns:a="http://schemas.openxmlformats.org/drawingml/2006/main" xmlns:p="http://schemas.openxmlformats.org/presentationml/2006/main" xmlns:r="http://schemas.openxmlformats.org/officeDocument/2006/relationships">
+  <p:cSld>
+    <p:spTree>
+      <p:nvGrpSpPr>
+        <p:cNvPr id="1" name=""/>
+        <p:cNvGrpSpPr/>
+        <p:nvPr/>
+      </p:nvGrpSpPr>
+      <p:grpSpPr/>
+      <p:sp>
+        <p:nvSpPr>
+          <p:cNvPr id="2" name="Rectangle 1"/>
+          <p:cNvSpPr/>
+          <p:nvPr/>
+        </p:nvSpPr>
+        <p:spPr>
+          <a:xfrm>
+            <a:off x="0" y="0"/>
+            <a:ext cx="12191695" cy="6858000"/>
+          </a:xfrm>
+          <a:prstGeom prst="rect">
+            <a:avLst/>
+          </a:prstGeom>
+          <a:solidFill>
+            <a:srgbClr val="1F2937"/>
+          </a:solidFill>
+          <a:ln>
+            <a:noFill/>
+          </a:ln>
+          <a:effectLst/>
+        </p:spPr>
+        <p:style>
+          <a:lnRef idx="1">
+            <a:schemeClr val="accent1"/>
+          </a:lnRef>
+          <a:fillRef idx="3">
+            <a:schemeClr val="accent1"/>
+          </a:fillRef>
+          <a:effectRef idx="2">
+            <a:schemeClr val="accent1"/>
+          </a:effectRef>
+          <a:fontRef idx="minor">
+            <a:schemeClr val="lt1"/>
+          </a:fontRef>
+        </p:style>
+        <p:txBody>
+          <a:bodyPr rtlCol="0" anchor="ctr"/>
+          <a:lstStyle/>
+          <a:p>
+            <a:pPr algn="ctr"/>
+          </a:p>
+        </p:txBody>
+      </p:sp>
+      <p:sp>
+        <p:nvSpPr>
+          <p:cNvPr id="3" name="TextBox 2"/>
+          <p:cNvSpPr txBox="1"/>
+          <p:nvPr/>
+        </p:nvSpPr>
+        <p:spPr>
+          <a:xfrm>
+            <a:off x="914400" y="2743200"/>
+            <a:ext cx="10332720" cy="914400"/>
+          </a:xfrm>
+          <a:prstGeom prst="rect">
+            <a:avLst/>
+          </a:prstGeom>
+          <a:noFill/>
+        </p:spPr>
+        <p:txBody>
+          <a:bodyPr wrap="square">
+            <a:spAutoFit/>
+          </a:bodyPr>
+          <a:lstStyle/>
+          <a:p>
+            <a:pPr algn="l"/>
+            <a:r>
+              <a:rPr sz="3600" b="1">
+                <a:solidFill>
+                  <a:srgbClr val="FFFFFF"/>
+                </a:solidFill>
+                <a:latin typeface="맑은 고딕"/>
+              </a:rPr>
+              <a:t>감사합니다</a:t>
+            </a:r>
+          </a:p>
+        </p:txBody>
+      </p:sp>
+      <p:sp>
+        <p:nvSpPr>
+          <p:cNvPr id="4" name="TextBox 3"/>
+          <p:cNvSpPr txBox="1"/>
+          <p:nvPr/>
+        </p:nvSpPr>
+        <p:spPr>
+          <a:xfrm>
+            <a:off x="914400" y="3566160"/>
+            <a:ext cx="10332720" cy="731520"/>
+          </a:xfrm>
+          <a:prstGeom prst="rect">
+            <a:avLst/>
+          </a:prstGeom>
+          <a:noFill/>
+        </p:spPr>
+        <p:txBody>
+          <a:bodyPr wrap="square">
+            <a:spAutoFit/>
+          </a:bodyPr>
+          <a:lstStyle/>
+          <a:p>
+            <a:pPr algn="l"/>
+            <a:r>
+              <a:rPr sz="1500" b="0">
+                <a:solidFill>
+                  <a:srgbClr val="CBD5E1"/>
+                </a:solidFill>
+                <a:latin typeface="맑은 고딕"/>
+              </a:rPr>
+              <a:t>설계부터 운영/트러블슈팅까지 전 과정을 직접 수행한 경험을 담았습니다.</a:t>
+            </a:r>
+          </a:p>
+        </p:txBody>
+      </p:sp>
+      <p:sp>
+        <p:nvSpPr>
+          <p:cNvPr id="5" name="TextBox 4"/>
+          <p:cNvSpPr txBox="1"/>
+          <p:nvPr/>
+        </p:nvSpPr>
+        <p:spPr>
+          <a:xfrm>
+            <a:off x="457200" y="6473952"/>
+            <a:ext cx="5486400" cy="320040"/>
+          </a:xfrm>
+          <a:prstGeom prst="rect">
+            <a:avLst/>
+          </a:prstGeom>
+          <a:noFill/>
+        </p:spPr>
+        <p:txBody>
+          <a:bodyPr wrap="square">
+            <a:spAutoFit/>
+          </a:bodyPr>
+          <a:lstStyle/>
+          <a:p>
+            <a:pPr algn="l"/>
+            <a:r>
+              <a:rPr sz="1000" b="0">
+                <a:solidFill>
+                  <a:srgbClr val="999999"/>
+                </a:solidFill>
+                <a:latin typeface="맑은 고딕"/>
+              </a:rPr>
+              <a:t>컨테이너 오케스트레이션 &amp; 통합 관제 플랫폼</a:t>
+            </a:r>
+          </a:p>
+        </p:txBody>
+      </p:sp>
+      <p:sp>
+        <p:nvSpPr>
+          <p:cNvPr id="6" name="TextBox 5"/>
+          <p:cNvSpPr txBox="1"/>
+          <p:nvPr/>
+        </p:nvSpPr>
+        <p:spPr>
+          <a:xfrm>
+            <a:off x="11247120" y="6473952"/>
+            <a:ext cx="640080" cy="320040"/>
+          </a:xfrm>
+          <a:prstGeom prst="rect">
+            <a:avLst/>
+          </a:prstGeom>
+          <a:noFill/>
+        </p:spPr>
+        <p:txBody>
+          <a:bodyPr wrap="square">
+            <a:spAutoFit/>
+          </a:bodyPr>
+          <a:lstStyle/>
+          <a:p>
+            <a:pPr algn="r"/>
+            <a:r>
+              <a:rPr sz="1000" b="0">
+                <a:solidFill>
+                  <a:srgbClr val="999999"/>
+                </a:solidFill>
+                <a:latin typeface="맑은 고딕"/>
+              </a:rPr>
+              <a:t>14</a:t>
             </a:r>
           </a:p>
         </p:txBody>
@@ -7242,21 +7814,432 @@
                 </a:solidFill>
                 <a:latin typeface="맑은 고딕"/>
               </a:rPr>
-              <a:t>핵심 성과</a:t>
-            </a:r>
-          </a:p>
-        </p:txBody>
-      </p:sp>
-      <p:sp>
-        <p:nvSpPr>
-          <p:cNvPr id="5" name="Rounded Rectangle 4"/>
+              <a:t>실제 개발 화면</a:t>
+            </a:r>
+          </a:p>
+        </p:txBody>
+      </p:sp>
+      <p:sp>
+        <p:nvSpPr>
+          <p:cNvPr id="5" name="TextBox 4"/>
+          <p:cNvSpPr txBox="1"/>
+          <p:nvPr/>
+        </p:nvSpPr>
+        <p:spPr>
+          <a:xfrm>
+            <a:off x="457200" y="621792"/>
+            <a:ext cx="11247120" cy="365760"/>
+          </a:xfrm>
+          <a:prstGeom prst="rect">
+            <a:avLst/>
+          </a:prstGeom>
+          <a:noFill/>
+        </p:spPr>
+        <p:txBody>
+          <a:bodyPr wrap="square">
+            <a:spAutoFit/>
+          </a:bodyPr>
+          <a:lstStyle/>
+          <a:p>
+            <a:pPr algn="l"/>
+            <a:r>
+              <a:rPr sz="1300" b="0">
+                <a:solidFill>
+                  <a:srgbClr val="CBD5E1"/>
+                </a:solidFill>
+                <a:latin typeface="맑은 고딕"/>
+              </a:rPr>
+              <a:t>관제 콘솔 UI — 표시된 ID/IP는 예시 데이터로 대체</a:t>
+            </a:r>
+          </a:p>
+        </p:txBody>
+      </p:sp>
+      <p:sp>
+        <p:nvSpPr>
+          <p:cNvPr id="6" name="Rounded Rectangle 5"/>
           <p:cNvSpPr/>
           <p:nvPr/>
         </p:nvSpPr>
         <p:spPr>
           <a:xfrm>
-            <a:off x="640080" y="1554480"/>
-            <a:ext cx="548640" cy="548640"/>
+            <a:off x="640080" y="1371600"/>
+            <a:ext cx="10881360" cy="365760"/>
+          </a:xfrm>
+          <a:prstGeom prst="roundRect">
+            <a:avLst/>
+          </a:prstGeom>
+          <a:solidFill>
+            <a:srgbClr val="E8EAED"/>
+          </a:solidFill>
+          <a:ln>
+            <a:solidFill>
+              <a:srgbClr val="E8EAED"/>
+            </a:solidFill>
+          </a:ln>
+          <a:effectLst/>
+        </p:spPr>
+        <p:style>
+          <a:lnRef idx="1">
+            <a:schemeClr val="accent1"/>
+          </a:lnRef>
+          <a:fillRef idx="3">
+            <a:schemeClr val="accent1"/>
+          </a:fillRef>
+          <a:effectRef idx="2">
+            <a:schemeClr val="accent1"/>
+          </a:effectRef>
+          <a:fontRef idx="minor">
+            <a:schemeClr val="lt1"/>
+          </a:fontRef>
+        </p:style>
+        <p:txBody>
+          <a:bodyPr rtlCol="0" anchor="ctr" wrap="square"/>
+          <a:lstStyle/>
+          <a:p>
+            <a:pPr algn="ctr"/>
+            <a:r>
+              <a:rPr sz="1300" b="1">
+                <a:solidFill>
+                  <a:srgbClr val="FFFFFF"/>
+                </a:solidFill>
+                <a:latin typeface="맑은 고딕"/>
+              </a:rPr>
+              <a:t/>
+            </a:r>
+          </a:p>
+        </p:txBody>
+      </p:sp>
+      <p:sp>
+        <p:nvSpPr>
+          <p:cNvPr id="7" name="Oval 6"/>
+          <p:cNvSpPr/>
+          <p:nvPr/>
+        </p:nvSpPr>
+        <p:spPr>
+          <a:xfrm>
+            <a:off x="777240" y="1481328"/>
+            <a:ext cx="128016" cy="128016"/>
+          </a:xfrm>
+          <a:prstGeom prst="ellipse">
+            <a:avLst/>
+          </a:prstGeom>
+          <a:solidFill>
+            <a:srgbClr val="C7CBD1"/>
+          </a:solidFill>
+          <a:ln>
+            <a:solidFill>
+              <a:srgbClr val="C7CBD1"/>
+            </a:solidFill>
+          </a:ln>
+          <a:effectLst/>
+        </p:spPr>
+        <p:style>
+          <a:lnRef idx="1">
+            <a:schemeClr val="accent1"/>
+          </a:lnRef>
+          <a:fillRef idx="3">
+            <a:schemeClr val="accent1"/>
+          </a:fillRef>
+          <a:effectRef idx="2">
+            <a:schemeClr val="accent1"/>
+          </a:effectRef>
+          <a:fontRef idx="minor">
+            <a:schemeClr val="lt1"/>
+          </a:fontRef>
+        </p:style>
+        <p:txBody>
+          <a:bodyPr rtlCol="0" anchor="ctr" wrap="square"/>
+          <a:lstStyle/>
+          <a:p>
+            <a:pPr algn="ctr"/>
+            <a:r>
+              <a:rPr sz="1300" b="1">
+                <a:solidFill>
+                  <a:srgbClr val="FFFFFF"/>
+                </a:solidFill>
+                <a:latin typeface="맑은 고딕"/>
+              </a:rPr>
+              <a:t/>
+            </a:r>
+          </a:p>
+        </p:txBody>
+      </p:sp>
+      <p:sp>
+        <p:nvSpPr>
+          <p:cNvPr id="8" name="Oval 7"/>
+          <p:cNvSpPr/>
+          <p:nvPr/>
+        </p:nvSpPr>
+        <p:spPr>
+          <a:xfrm>
+            <a:off x="978408" y="1481328"/>
+            <a:ext cx="128016" cy="128016"/>
+          </a:xfrm>
+          <a:prstGeom prst="ellipse">
+            <a:avLst/>
+          </a:prstGeom>
+          <a:solidFill>
+            <a:srgbClr val="C7CBD1"/>
+          </a:solidFill>
+          <a:ln>
+            <a:solidFill>
+              <a:srgbClr val="C7CBD1"/>
+            </a:solidFill>
+          </a:ln>
+          <a:effectLst/>
+        </p:spPr>
+        <p:style>
+          <a:lnRef idx="1">
+            <a:schemeClr val="accent1"/>
+          </a:lnRef>
+          <a:fillRef idx="3">
+            <a:schemeClr val="accent1"/>
+          </a:fillRef>
+          <a:effectRef idx="2">
+            <a:schemeClr val="accent1"/>
+          </a:effectRef>
+          <a:fontRef idx="minor">
+            <a:schemeClr val="lt1"/>
+          </a:fontRef>
+        </p:style>
+        <p:txBody>
+          <a:bodyPr rtlCol="0" anchor="ctr" wrap="square"/>
+          <a:lstStyle/>
+          <a:p>
+            <a:pPr algn="ctr"/>
+            <a:r>
+              <a:rPr sz="1300" b="1">
+                <a:solidFill>
+                  <a:srgbClr val="FFFFFF"/>
+                </a:solidFill>
+                <a:latin typeface="맑은 고딕"/>
+              </a:rPr>
+              <a:t/>
+            </a:r>
+          </a:p>
+        </p:txBody>
+      </p:sp>
+      <p:sp>
+        <p:nvSpPr>
+          <p:cNvPr id="9" name="Oval 8"/>
+          <p:cNvSpPr/>
+          <p:nvPr/>
+        </p:nvSpPr>
+        <p:spPr>
+          <a:xfrm>
+            <a:off x="1179576" y="1481328"/>
+            <a:ext cx="128016" cy="128016"/>
+          </a:xfrm>
+          <a:prstGeom prst="ellipse">
+            <a:avLst/>
+          </a:prstGeom>
+          <a:solidFill>
+            <a:srgbClr val="C7CBD1"/>
+          </a:solidFill>
+          <a:ln>
+            <a:solidFill>
+              <a:srgbClr val="C7CBD1"/>
+            </a:solidFill>
+          </a:ln>
+          <a:effectLst/>
+        </p:spPr>
+        <p:style>
+          <a:lnRef idx="1">
+            <a:schemeClr val="accent1"/>
+          </a:lnRef>
+          <a:fillRef idx="3">
+            <a:schemeClr val="accent1"/>
+          </a:fillRef>
+          <a:effectRef idx="2">
+            <a:schemeClr val="accent1"/>
+          </a:effectRef>
+          <a:fontRef idx="minor">
+            <a:schemeClr val="lt1"/>
+          </a:fontRef>
+        </p:style>
+        <p:txBody>
+          <a:bodyPr rtlCol="0" anchor="ctr" wrap="square"/>
+          <a:lstStyle/>
+          <a:p>
+            <a:pPr algn="ctr"/>
+            <a:r>
+              <a:rPr sz="1300" b="1">
+                <a:solidFill>
+                  <a:srgbClr val="FFFFFF"/>
+                </a:solidFill>
+                <a:latin typeface="맑은 고딕"/>
+              </a:rPr>
+              <a:t/>
+            </a:r>
+          </a:p>
+        </p:txBody>
+      </p:sp>
+      <p:sp>
+        <p:nvSpPr>
+          <p:cNvPr id="10" name="Rounded Rectangle 9"/>
+          <p:cNvSpPr/>
+          <p:nvPr/>
+        </p:nvSpPr>
+        <p:spPr>
+          <a:xfrm>
+            <a:off x="1463040" y="1426464"/>
+            <a:ext cx="3657600" cy="256032"/>
+          </a:xfrm>
+          <a:prstGeom prst="roundRect">
+            <a:avLst/>
+          </a:prstGeom>
+          <a:solidFill>
+            <a:srgbClr val="FFFFFF"/>
+          </a:solidFill>
+          <a:ln>
+            <a:solidFill>
+              <a:srgbClr val="FFFFFF"/>
+            </a:solidFill>
+          </a:ln>
+          <a:effectLst/>
+        </p:spPr>
+        <p:style>
+          <a:lnRef idx="1">
+            <a:schemeClr val="accent1"/>
+          </a:lnRef>
+          <a:fillRef idx="3">
+            <a:schemeClr val="accent1"/>
+          </a:fillRef>
+          <a:effectRef idx="2">
+            <a:schemeClr val="accent1"/>
+          </a:effectRef>
+          <a:fontRef idx="minor">
+            <a:schemeClr val="lt1"/>
+          </a:fontRef>
+        </p:style>
+        <p:txBody>
+          <a:bodyPr rtlCol="0" anchor="ctr" wrap="square"/>
+          <a:lstStyle/>
+          <a:p>
+            <a:pPr algn="ctr"/>
+            <a:r>
+              <a:rPr sz="900" b="0">
+                <a:solidFill>
+                  <a:srgbClr val="888888"/>
+                </a:solidFill>
+                <a:latin typeface="맑은 고딕"/>
+              </a:rPr>
+              <a:t>내부망 관제 콘솔 주소</a:t>
+            </a:r>
+          </a:p>
+        </p:txBody>
+      </p:sp>
+      <p:sp>
+        <p:nvSpPr>
+          <p:cNvPr id="11" name="Rectangle 10"/>
+          <p:cNvSpPr/>
+          <p:nvPr/>
+        </p:nvSpPr>
+        <p:spPr>
+          <a:xfrm>
+            <a:off x="640080" y="1737360"/>
+            <a:ext cx="10881360" cy="4434840"/>
+          </a:xfrm>
+          <a:prstGeom prst="rect">
+            <a:avLst/>
+          </a:prstGeom>
+          <a:solidFill>
+            <a:srgbClr val="FFFFFF"/>
+          </a:solidFill>
+          <a:ln>
+            <a:solidFill>
+              <a:srgbClr val="E0E0E0"/>
+            </a:solidFill>
+          </a:ln>
+          <a:effectLst/>
+        </p:spPr>
+        <p:style>
+          <a:lnRef idx="1">
+            <a:schemeClr val="accent1"/>
+          </a:lnRef>
+          <a:fillRef idx="3">
+            <a:schemeClr val="accent1"/>
+          </a:fillRef>
+          <a:effectRef idx="2">
+            <a:schemeClr val="accent1"/>
+          </a:effectRef>
+          <a:fontRef idx="minor">
+            <a:schemeClr val="lt1"/>
+          </a:fontRef>
+        </p:style>
+        <p:txBody>
+          <a:bodyPr rtlCol="0" anchor="ctr"/>
+          <a:lstStyle/>
+          <a:p>
+            <a:pPr algn="ctr"/>
+          </a:p>
+        </p:txBody>
+      </p:sp>
+      <p:sp>
+        <p:nvSpPr>
+          <p:cNvPr id="12" name="Rounded Rectangle 11"/>
+          <p:cNvSpPr/>
+          <p:nvPr/>
+        </p:nvSpPr>
+        <p:spPr>
+          <a:xfrm>
+            <a:off x="868680" y="1920240"/>
+            <a:ext cx="1371600" cy="365760"/>
+          </a:xfrm>
+          <a:prstGeom prst="roundRect">
+            <a:avLst/>
+          </a:prstGeom>
+          <a:solidFill>
+            <a:srgbClr val="1F2937"/>
+          </a:solidFill>
+          <a:ln>
+            <a:solidFill>
+              <a:srgbClr val="1F2937"/>
+            </a:solidFill>
+          </a:ln>
+          <a:effectLst/>
+        </p:spPr>
+        <p:style>
+          <a:lnRef idx="1">
+            <a:schemeClr val="accent1"/>
+          </a:lnRef>
+          <a:fillRef idx="3">
+            <a:schemeClr val="accent1"/>
+          </a:fillRef>
+          <a:effectRef idx="2">
+            <a:schemeClr val="accent1"/>
+          </a:effectRef>
+          <a:fontRef idx="minor">
+            <a:schemeClr val="lt1"/>
+          </a:fontRef>
+        </p:style>
+        <p:txBody>
+          <a:bodyPr rtlCol="0" anchor="ctr" wrap="square"/>
+          <a:lstStyle/>
+          <a:p>
+            <a:pPr algn="ctr"/>
+            <a:r>
+              <a:rPr sz="1100" b="1">
+                <a:solidFill>
+                  <a:srgbClr val="FFFFFF"/>
+                </a:solidFill>
+                <a:latin typeface="맑은 고딕"/>
+              </a:rPr>
+              <a:t>🖥️ DCSManager</a:t>
+            </a:r>
+          </a:p>
+        </p:txBody>
+      </p:sp>
+      <p:sp>
+        <p:nvSpPr>
+          <p:cNvPr id="13" name="Rounded Rectangle 12"/>
+          <p:cNvSpPr/>
+          <p:nvPr/>
+        </p:nvSpPr>
+        <p:spPr>
+          <a:xfrm>
+            <a:off x="2377440" y="1920240"/>
+            <a:ext cx="1143000" cy="365760"/>
           </a:xfrm>
           <a:prstGeom prst="roundRect">
             <a:avLst/>
@@ -7291,62 +8274,27 @@
           <a:p>
             <a:pPr algn="ctr"/>
             <a:r>
-              <a:rPr sz="1800" b="1">
+              <a:rPr sz="1000" b="1">
                 <a:solidFill>
                   <a:srgbClr val="FFFFFF"/>
                 </a:solidFill>
                 <a:latin typeface="맑은 고딕"/>
               </a:rPr>
-              <a:t>1</a:t>
-            </a:r>
-          </a:p>
-        </p:txBody>
-      </p:sp>
-      <p:sp>
-        <p:nvSpPr>
-          <p:cNvPr id="6" name="TextBox 5"/>
-          <p:cNvSpPr txBox="1"/>
-          <p:nvPr/>
-        </p:nvSpPr>
-        <p:spPr>
-          <a:xfrm>
-            <a:off x="1371600" y="1581912"/>
-            <a:ext cx="10058400" cy="685800"/>
-          </a:xfrm>
-          <a:prstGeom prst="rect">
-            <a:avLst/>
-          </a:prstGeom>
-          <a:noFill/>
-        </p:spPr>
-        <p:txBody>
-          <a:bodyPr wrap="square">
-            <a:spAutoFit/>
-          </a:bodyPr>
-          <a:lstStyle/>
-          <a:p>
-            <a:pPr algn="l"/>
-            <a:r>
-              <a:rPr sz="1600" b="0">
-                <a:solidFill>
-                  <a:srgbClr val="1F2937"/>
-                </a:solidFill>
-                <a:latin typeface="맑은 고딕"/>
-              </a:rPr>
-              <a:t>가동/중지, 신규 등록, 삭제를 웹 UI에서 원클릭으로 처리 — 서버별 SSH 접속 불필요</a:t>
-            </a:r>
-          </a:p>
-        </p:txBody>
-      </p:sp>
-      <p:sp>
-        <p:nvSpPr>
-          <p:cNvPr id="7" name="Rounded Rectangle 6"/>
+              <a:t>📊 모니터링</a:t>
+            </a:r>
+          </a:p>
+        </p:txBody>
+      </p:sp>
+      <p:sp>
+        <p:nvSpPr>
+          <p:cNvPr id="14" name="Rounded Rectangle 13"/>
           <p:cNvSpPr/>
           <p:nvPr/>
         </p:nvSpPr>
         <p:spPr>
           <a:xfrm>
-            <a:off x="640080" y="2331720"/>
-            <a:ext cx="548640" cy="548640"/>
+            <a:off x="3630168" y="1920240"/>
+            <a:ext cx="1143000" cy="365760"/>
           </a:xfrm>
           <a:prstGeom prst="roundRect">
             <a:avLst/>
@@ -7381,62 +8329,27 @@
           <a:p>
             <a:pPr algn="ctr"/>
             <a:r>
-              <a:rPr sz="1800" b="1">
+              <a:rPr sz="1000" b="1">
                 <a:solidFill>
                   <a:srgbClr val="FFFFFF"/>
                 </a:solidFill>
                 <a:latin typeface="맑은 고딕"/>
               </a:rPr>
-              <a:t>2</a:t>
-            </a:r>
-          </a:p>
-        </p:txBody>
-      </p:sp>
-      <p:sp>
-        <p:nvSpPr>
-          <p:cNvPr id="8" name="TextBox 7"/>
-          <p:cNvSpPr txBox="1"/>
-          <p:nvPr/>
-        </p:nvSpPr>
-        <p:spPr>
-          <a:xfrm>
-            <a:off x="1371600" y="2359152"/>
-            <a:ext cx="10058400" cy="685800"/>
-          </a:xfrm>
-          <a:prstGeom prst="rect">
-            <a:avLst/>
-          </a:prstGeom>
-          <a:noFill/>
-        </p:spPr>
-        <p:txBody>
-          <a:bodyPr wrap="square">
-            <a:spAutoFit/>
-          </a:bodyPr>
-          <a:lstStyle/>
-          <a:p>
-            <a:pPr algn="l"/>
-            <a:r>
-              <a:rPr sz="1600" b="0">
-                <a:solidFill>
-                  <a:srgbClr val="1F2937"/>
-                </a:solidFill>
-                <a:latin typeface="맑은 고딕"/>
-              </a:rPr>
-              <a:t>인스턴스 확장 가능한 구조 설계 (Server가 DB 기반 라우팅 테이블로 물리 서버 위치 관리)</a:t>
-            </a:r>
-          </a:p>
-        </p:txBody>
-      </p:sp>
-      <p:sp>
-        <p:nvSpPr>
-          <p:cNvPr id="9" name="Rounded Rectangle 8"/>
+              <a:t>📦 Registry</a:t>
+            </a:r>
+          </a:p>
+        </p:txBody>
+      </p:sp>
+      <p:sp>
+        <p:nvSpPr>
+          <p:cNvPr id="15" name="Rounded Rectangle 14"/>
           <p:cNvSpPr/>
           <p:nvPr/>
         </p:nvSpPr>
         <p:spPr>
           <a:xfrm>
-            <a:off x="640080" y="3108960"/>
-            <a:ext cx="548640" cy="548640"/>
+            <a:off x="4882896" y="1920240"/>
+            <a:ext cx="1143000" cy="365760"/>
           </a:xfrm>
           <a:prstGeom prst="roundRect">
             <a:avLst/>
@@ -7471,62 +8384,27 @@
           <a:p>
             <a:pPr algn="ctr"/>
             <a:r>
-              <a:rPr sz="1800" b="1">
+              <a:rPr sz="1000" b="1">
                 <a:solidFill>
                   <a:srgbClr val="FFFFFF"/>
                 </a:solidFill>
                 <a:latin typeface="맑은 고딕"/>
               </a:rPr>
-              <a:t>3</a:t>
-            </a:r>
-          </a:p>
-        </p:txBody>
-      </p:sp>
-      <p:sp>
-        <p:nvSpPr>
-          <p:cNvPr id="10" name="TextBox 9"/>
-          <p:cNvSpPr txBox="1"/>
-          <p:nvPr/>
-        </p:nvSpPr>
-        <p:spPr>
-          <a:xfrm>
-            <a:off x="1371600" y="3136392"/>
-            <a:ext cx="10058400" cy="685800"/>
-          </a:xfrm>
-          <a:prstGeom prst="rect">
-            <a:avLst/>
-          </a:prstGeom>
-          <a:noFill/>
-        </p:spPr>
-        <p:txBody>
-          <a:bodyPr wrap="square">
-            <a:spAutoFit/>
-          </a:bodyPr>
-          <a:lstStyle/>
-          <a:p>
-            <a:pPr algn="l"/>
-            <a:r>
-              <a:rPr sz="1600" b="0">
-                <a:solidFill>
-                  <a:srgbClr val="1F2937"/>
-                </a:solidFill>
-                <a:latin typeface="맑은 고딕"/>
-              </a:rPr>
-              <a:t>자체 TCP 프로토콜로 파일 릴레이 시스템을 처음부터 구현, 운영 실데이터 보호 로직 적용</a:t>
-            </a:r>
-          </a:p>
-        </p:txBody>
-      </p:sp>
-      <p:sp>
-        <p:nvSpPr>
-          <p:cNvPr id="11" name="Rounded Rectangle 10"/>
+              <a:t>🐳 Advisor</a:t>
+            </a:r>
+          </a:p>
+        </p:txBody>
+      </p:sp>
+      <p:sp>
+        <p:nvSpPr>
+          <p:cNvPr id="16" name="Rounded Rectangle 15"/>
           <p:cNvSpPr/>
           <p:nvPr/>
         </p:nvSpPr>
         <p:spPr>
           <a:xfrm>
-            <a:off x="640080" y="3886200"/>
-            <a:ext cx="548640" cy="548640"/>
+            <a:off x="6135624" y="1920240"/>
+            <a:ext cx="1143000" cy="365760"/>
           </a:xfrm>
           <a:prstGeom prst="roundRect">
             <a:avLst/>
@@ -7561,72 +8439,37 @@
           <a:p>
             <a:pPr algn="ctr"/>
             <a:r>
-              <a:rPr sz="1800" b="1">
+              <a:rPr sz="1000" b="1">
                 <a:solidFill>
                   <a:srgbClr val="FFFFFF"/>
                 </a:solidFill>
                 <a:latin typeface="맑은 고딕"/>
               </a:rPr>
-              <a:t>4</a:t>
-            </a:r>
-          </a:p>
-        </p:txBody>
-      </p:sp>
-      <p:sp>
-        <p:nvSpPr>
-          <p:cNvPr id="12" name="TextBox 11"/>
-          <p:cNvSpPr txBox="1"/>
-          <p:nvPr/>
-        </p:nvSpPr>
-        <p:spPr>
-          <a:xfrm>
-            <a:off x="1371600" y="3913632"/>
-            <a:ext cx="10058400" cy="685800"/>
-          </a:xfrm>
-          <a:prstGeom prst="rect">
-            <a:avLst/>
-          </a:prstGeom>
-          <a:noFill/>
-        </p:spPr>
-        <p:txBody>
-          <a:bodyPr wrap="square">
-            <a:spAutoFit/>
-          </a:bodyPr>
-          <a:lstStyle/>
-          <a:p>
-            <a:pPr algn="l"/>
-            <a:r>
-              <a:rPr sz="1600" b="0">
-                <a:solidFill>
-                  <a:srgbClr val="1F2937"/>
-                </a:solidFill>
-                <a:latin typeface="맑은 고딕"/>
-              </a:rPr>
-              <a:t>Prometheus/Grafana 인프라 모니터링에 업무 지표를 자연스럽게 통합</a:t>
-            </a:r>
-          </a:p>
-        </p:txBody>
-      </p:sp>
-      <p:sp>
-        <p:nvSpPr>
-          <p:cNvPr id="13" name="Rounded Rectangle 12"/>
+              <a:t>🗄️ MariaDB</a:t>
+            </a:r>
+          </a:p>
+        </p:txBody>
+      </p:sp>
+      <p:sp>
+        <p:nvSpPr>
+          <p:cNvPr id="17" name="Rounded Rectangle 16"/>
           <p:cNvSpPr/>
           <p:nvPr/>
         </p:nvSpPr>
         <p:spPr>
           <a:xfrm>
-            <a:off x="640080" y="4663440"/>
-            <a:ext cx="548640" cy="548640"/>
+            <a:off x="868680" y="2423160"/>
+            <a:ext cx="1463040" cy="320040"/>
           </a:xfrm>
           <a:prstGeom prst="roundRect">
             <a:avLst/>
           </a:prstGeom>
           <a:solidFill>
-            <a:srgbClr val="2F6FED"/>
+            <a:srgbClr val="7C3AED"/>
           </a:solidFill>
           <a:ln>
             <a:solidFill>
-              <a:srgbClr val="2F6FED"/>
+              <a:srgbClr val="7C3AED"/>
             </a:solidFill>
           </a:ln>
           <a:effectLst/>
@@ -7651,72 +8494,37 @@
           <a:p>
             <a:pPr algn="ctr"/>
             <a:r>
-              <a:rPr sz="1800" b="1">
+              <a:rPr sz="1100" b="1">
                 <a:solidFill>
                   <a:srgbClr val="FFFFFF"/>
                 </a:solidFill>
                 <a:latin typeface="맑은 고딕"/>
               </a:rPr>
-              <a:t>5</a:t>
-            </a:r>
-          </a:p>
-        </p:txBody>
-      </p:sp>
-      <p:sp>
-        <p:nvSpPr>
-          <p:cNvPr id="14" name="TextBox 13"/>
-          <p:cNvSpPr txBox="1"/>
-          <p:nvPr/>
-        </p:nvSpPr>
-        <p:spPr>
-          <a:xfrm>
-            <a:off x="1371600" y="4690872"/>
-            <a:ext cx="10058400" cy="685800"/>
-          </a:xfrm>
-          <a:prstGeom prst="rect">
-            <a:avLst/>
-          </a:prstGeom>
-          <a:noFill/>
-        </p:spPr>
-        <p:txBody>
-          <a:bodyPr wrap="square">
-            <a:spAutoFit/>
-          </a:bodyPr>
-          <a:lstStyle/>
-          <a:p>
-            <a:pPr algn="l"/>
-            <a:r>
-              <a:rPr sz="1600" b="0">
-                <a:solidFill>
-                  <a:srgbClr val="1F2937"/>
-                </a:solidFill>
-                <a:latin typeface="맑은 고딕"/>
-              </a:rPr>
-              <a:t>상태 폴링 로직에 전이 감지를 추가해 장애 발생 시 개인 메신저로 즉시 알림</a:t>
-            </a:r>
-          </a:p>
-        </p:txBody>
-      </p:sp>
-      <p:sp>
-        <p:nvSpPr>
-          <p:cNvPr id="15" name="Rounded Rectangle 14"/>
+              <a:t>DCS 컨테이너</a:t>
+            </a:r>
+          </a:p>
+        </p:txBody>
+      </p:sp>
+      <p:sp>
+        <p:nvSpPr>
+          <p:cNvPr id="18" name="Rounded Rectangle 17"/>
           <p:cNvSpPr/>
           <p:nvPr/>
         </p:nvSpPr>
         <p:spPr>
           <a:xfrm>
-            <a:off x="640080" y="5440680"/>
-            <a:ext cx="548640" cy="548640"/>
+            <a:off x="2331720" y="2423160"/>
+            <a:ext cx="1463040" cy="320040"/>
           </a:xfrm>
           <a:prstGeom prst="roundRect">
             <a:avLst/>
           </a:prstGeom>
           <a:solidFill>
-            <a:srgbClr val="2F6FED"/>
+            <a:srgbClr val="EEEEEE"/>
           </a:solidFill>
           <a:ln>
             <a:solidFill>
-              <a:srgbClr val="2F6FED"/>
+              <a:srgbClr val="EEEEEE"/>
             </a:solidFill>
           </a:ln>
           <a:effectLst/>
@@ -7741,27 +8549,73 @@
           <a:p>
             <a:pPr algn="ctr"/>
             <a:r>
-              <a:rPr sz="1800" b="1">
-                <a:solidFill>
-                  <a:srgbClr val="FFFFFF"/>
-                </a:solidFill>
-                <a:latin typeface="맑은 고딕"/>
-              </a:rPr>
-              <a:t>6</a:t>
-            </a:r>
-          </a:p>
-        </p:txBody>
-      </p:sp>
-      <p:sp>
-        <p:nvSpPr>
-          <p:cNvPr id="16" name="TextBox 15"/>
+              <a:rPr sz="1100" b="1">
+                <a:solidFill>
+                  <a:srgbClr val="555555"/>
+                </a:solidFill>
+                <a:latin typeface="맑은 고딕"/>
+              </a:rPr>
+              <a:t>기타 컨테이너</a:t>
+            </a:r>
+          </a:p>
+        </p:txBody>
+      </p:sp>
+      <p:sp>
+        <p:nvSpPr>
+          <p:cNvPr id="19" name="Rounded Rectangle 18"/>
+          <p:cNvSpPr/>
+          <p:nvPr/>
+        </p:nvSpPr>
+        <p:spPr>
+          <a:xfrm>
+            <a:off x="868680" y="2926080"/>
+            <a:ext cx="10424160" cy="1828800"/>
+          </a:xfrm>
+          <a:prstGeom prst="roundRect">
+            <a:avLst/>
+          </a:prstGeom>
+          <a:solidFill>
+            <a:srgbClr val="FAFBFC"/>
+          </a:solidFill>
+          <a:ln>
+            <a:solidFill>
+              <a:srgbClr val="E0E0E0"/>
+            </a:solidFill>
+          </a:ln>
+          <a:effectLst/>
+        </p:spPr>
+        <p:style>
+          <a:lnRef idx="1">
+            <a:schemeClr val="accent1"/>
+          </a:lnRef>
+          <a:fillRef idx="3">
+            <a:schemeClr val="accent1"/>
+          </a:fillRef>
+          <a:effectRef idx="2">
+            <a:schemeClr val="accent1"/>
+          </a:effectRef>
+          <a:fontRef idx="minor">
+            <a:schemeClr val="lt1"/>
+          </a:fontRef>
+        </p:style>
+        <p:txBody>
+          <a:bodyPr rtlCol="0" anchor="ctr"/>
+          <a:lstStyle/>
+          <a:p>
+            <a:pPr algn="ctr"/>
+          </a:p>
+        </p:txBody>
+      </p:sp>
+      <p:sp>
+        <p:nvSpPr>
+          <p:cNvPr id="20" name="TextBox 19"/>
           <p:cNvSpPr txBox="1"/>
           <p:nvPr/>
         </p:nvSpPr>
         <p:spPr>
           <a:xfrm>
-            <a:off x="1371600" y="5468112"/>
-            <a:ext cx="10058400" cy="685800"/>
+            <a:off x="1005840" y="2999232"/>
+            <a:ext cx="2743200" cy="274320"/>
           </a:xfrm>
           <a:prstGeom prst="rect">
             <a:avLst/>
@@ -7776,27 +8630,27 @@
           <a:p>
             <a:pPr algn="l"/>
             <a:r>
-              <a:rPr sz="1600" b="0">
+              <a:rPr sz="1300" b="1">
                 <a:solidFill>
                   <a:srgbClr val="1F2937"/>
                 </a:solidFill>
                 <a:latin typeface="맑은 고딕"/>
               </a:rPr>
-              <a:t>동기 블로킹 API를 비동기로 리팩터링해 UI 응답시간을 수십 초 → 0.2초로 단축</a:t>
-            </a:r>
-          </a:p>
-        </p:txBody>
-      </p:sp>
-      <p:sp>
-        <p:nvSpPr>
-          <p:cNvPr id="17" name="TextBox 16"/>
+              <a:t>컨테이너 리스트</a:t>
+            </a:r>
+          </a:p>
+        </p:txBody>
+      </p:sp>
+      <p:sp>
+        <p:nvSpPr>
+          <p:cNvPr id="21" name="TextBox 20"/>
           <p:cNvSpPr txBox="1"/>
           <p:nvPr/>
         </p:nvSpPr>
         <p:spPr>
           <a:xfrm>
-            <a:off x="457200" y="6473952"/>
-            <a:ext cx="5486400" cy="320040"/>
+            <a:off x="1005840" y="3383280"/>
+            <a:ext cx="1436914" cy="274320"/>
           </a:xfrm>
           <a:prstGeom prst="rect">
             <a:avLst/>
@@ -7811,6 +8665,1141 @@
           <a:p>
             <a:pPr algn="l"/>
             <a:r>
+              <a:rPr sz="1000" b="1">
+                <a:solidFill>
+                  <a:srgbClr val="555555"/>
+                </a:solidFill>
+                <a:latin typeface="맑은 고딕"/>
+              </a:rPr>
+              <a:t>DCS_ID</a:t>
+            </a:r>
+          </a:p>
+        </p:txBody>
+      </p:sp>
+      <p:sp>
+        <p:nvSpPr>
+          <p:cNvPr id="22" name="TextBox 21"/>
+          <p:cNvSpPr txBox="1"/>
+          <p:nvPr/>
+        </p:nvSpPr>
+        <p:spPr>
+          <a:xfrm>
+            <a:off x="2442754" y="3383280"/>
+            <a:ext cx="1436914" cy="274320"/>
+          </a:xfrm>
+          <a:prstGeom prst="rect">
+            <a:avLst/>
+          </a:prstGeom>
+          <a:noFill/>
+        </p:spPr>
+        <p:txBody>
+          <a:bodyPr wrap="square">
+            <a:spAutoFit/>
+          </a:bodyPr>
+          <a:lstStyle/>
+          <a:p>
+            <a:pPr algn="l"/>
+            <a:r>
+              <a:rPr sz="1000" b="1">
+                <a:solidFill>
+                  <a:srgbClr val="555555"/>
+                </a:solidFill>
+                <a:latin typeface="맑은 고딕"/>
+              </a:rPr>
+              <a:t>MODE</a:t>
+            </a:r>
+          </a:p>
+        </p:txBody>
+      </p:sp>
+      <p:sp>
+        <p:nvSpPr>
+          <p:cNvPr id="23" name="TextBox 22"/>
+          <p:cNvSpPr txBox="1"/>
+          <p:nvPr/>
+        </p:nvSpPr>
+        <p:spPr>
+          <a:xfrm>
+            <a:off x="3879668" y="3383280"/>
+            <a:ext cx="1436914" cy="274320"/>
+          </a:xfrm>
+          <a:prstGeom prst="rect">
+            <a:avLst/>
+          </a:prstGeom>
+          <a:noFill/>
+        </p:spPr>
+        <p:txBody>
+          <a:bodyPr wrap="square">
+            <a:spAutoFit/>
+          </a:bodyPr>
+          <a:lstStyle/>
+          <a:p>
+            <a:pPr algn="l"/>
+            <a:r>
+              <a:rPr sz="1000" b="1">
+                <a:solidFill>
+                  <a:srgbClr val="555555"/>
+                </a:solidFill>
+                <a:latin typeface="맑은 고딕"/>
+              </a:rPr>
+              <a:t>SIZE</a:t>
+            </a:r>
+          </a:p>
+        </p:txBody>
+      </p:sp>
+      <p:sp>
+        <p:nvSpPr>
+          <p:cNvPr id="24" name="TextBox 23"/>
+          <p:cNvSpPr txBox="1"/>
+          <p:nvPr/>
+        </p:nvSpPr>
+        <p:spPr>
+          <a:xfrm>
+            <a:off x="5316582" y="3383280"/>
+            <a:ext cx="1436914" cy="274320"/>
+          </a:xfrm>
+          <a:prstGeom prst="rect">
+            <a:avLst/>
+          </a:prstGeom>
+          <a:noFill/>
+        </p:spPr>
+        <p:txBody>
+          <a:bodyPr wrap="square">
+            <a:spAutoFit/>
+          </a:bodyPr>
+          <a:lstStyle/>
+          <a:p>
+            <a:pPr algn="l"/>
+            <a:r>
+              <a:rPr sz="1000" b="1">
+                <a:solidFill>
+                  <a:srgbClr val="555555"/>
+                </a:solidFill>
+                <a:latin typeface="맑은 고딕"/>
+              </a:rPr>
+              <a:t>PORT_1</a:t>
+            </a:r>
+          </a:p>
+        </p:txBody>
+      </p:sp>
+      <p:sp>
+        <p:nvSpPr>
+          <p:cNvPr id="25" name="TextBox 24"/>
+          <p:cNvSpPr txBox="1"/>
+          <p:nvPr/>
+        </p:nvSpPr>
+        <p:spPr>
+          <a:xfrm>
+            <a:off x="6753497" y="3383280"/>
+            <a:ext cx="1436914" cy="274320"/>
+          </a:xfrm>
+          <a:prstGeom prst="rect">
+            <a:avLst/>
+          </a:prstGeom>
+          <a:noFill/>
+        </p:spPr>
+        <p:txBody>
+          <a:bodyPr wrap="square">
+            <a:spAutoFit/>
+          </a:bodyPr>
+          <a:lstStyle/>
+          <a:p>
+            <a:pPr algn="l"/>
+            <a:r>
+              <a:rPr sz="1000" b="1">
+                <a:solidFill>
+                  <a:srgbClr val="555555"/>
+                </a:solidFill>
+                <a:latin typeface="맑은 고딕"/>
+              </a:rPr>
+              <a:t>PORT_2</a:t>
+            </a:r>
+          </a:p>
+        </p:txBody>
+      </p:sp>
+      <p:sp>
+        <p:nvSpPr>
+          <p:cNvPr id="26" name="TextBox 25"/>
+          <p:cNvSpPr txBox="1"/>
+          <p:nvPr/>
+        </p:nvSpPr>
+        <p:spPr>
+          <a:xfrm>
+            <a:off x="8190411" y="3383280"/>
+            <a:ext cx="1436914" cy="274320"/>
+          </a:xfrm>
+          <a:prstGeom prst="rect">
+            <a:avLst/>
+          </a:prstGeom>
+          <a:noFill/>
+        </p:spPr>
+        <p:txBody>
+          <a:bodyPr wrap="square">
+            <a:spAutoFit/>
+          </a:bodyPr>
+          <a:lstStyle/>
+          <a:p>
+            <a:pPr algn="l"/>
+            <a:r>
+              <a:rPr sz="1000" b="1">
+                <a:solidFill>
+                  <a:srgbClr val="555555"/>
+                </a:solidFill>
+                <a:latin typeface="맑은 고딕"/>
+              </a:rPr>
+              <a:t>SERVER_IP</a:t>
+            </a:r>
+          </a:p>
+        </p:txBody>
+      </p:sp>
+      <p:sp>
+        <p:nvSpPr>
+          <p:cNvPr id="27" name="TextBox 26"/>
+          <p:cNvSpPr txBox="1"/>
+          <p:nvPr/>
+        </p:nvSpPr>
+        <p:spPr>
+          <a:xfrm>
+            <a:off x="9627325" y="3383280"/>
+            <a:ext cx="1436914" cy="274320"/>
+          </a:xfrm>
+          <a:prstGeom prst="rect">
+            <a:avLst/>
+          </a:prstGeom>
+          <a:noFill/>
+        </p:spPr>
+        <p:txBody>
+          <a:bodyPr wrap="square">
+            <a:spAutoFit/>
+          </a:bodyPr>
+          <a:lstStyle/>
+          <a:p>
+            <a:pPr algn="l"/>
+            <a:r>
+              <a:rPr sz="1000" b="1">
+                <a:solidFill>
+                  <a:srgbClr val="555555"/>
+                </a:solidFill>
+                <a:latin typeface="맑은 고딕"/>
+              </a:rPr>
+              <a:t>STATUS</a:t>
+            </a:r>
+          </a:p>
+        </p:txBody>
+      </p:sp>
+      <p:sp>
+        <p:nvSpPr>
+          <p:cNvPr id="28" name="TextBox 27"/>
+          <p:cNvSpPr txBox="1"/>
+          <p:nvPr/>
+        </p:nvSpPr>
+        <p:spPr>
+          <a:xfrm>
+            <a:off x="1005840" y="3703320"/>
+            <a:ext cx="1436914" cy="274320"/>
+          </a:xfrm>
+          <a:prstGeom prst="rect">
+            <a:avLst/>
+          </a:prstGeom>
+          <a:noFill/>
+        </p:spPr>
+        <p:txBody>
+          <a:bodyPr wrap="square">
+            <a:spAutoFit/>
+          </a:bodyPr>
+          <a:lstStyle/>
+          <a:p>
+            <a:pPr algn="l"/>
+            <a:r>
+              <a:rPr sz="1100" b="0">
+                <a:solidFill>
+                  <a:srgbClr val="1F2937"/>
+                </a:solidFill>
+                <a:latin typeface="맑은 고딕"/>
+              </a:rPr>
+              <a:t>5500100001</a:t>
+            </a:r>
+          </a:p>
+        </p:txBody>
+      </p:sp>
+      <p:sp>
+        <p:nvSpPr>
+          <p:cNvPr id="29" name="Rounded Rectangle 28"/>
+          <p:cNvSpPr/>
+          <p:nvPr/>
+        </p:nvSpPr>
+        <p:spPr>
+          <a:xfrm>
+            <a:off x="2442754" y="3703320"/>
+            <a:ext cx="640080" cy="274320"/>
+          </a:xfrm>
+          <a:prstGeom prst="roundRect">
+            <a:avLst/>
+          </a:prstGeom>
+          <a:solidFill>
+            <a:srgbClr val="D64545"/>
+          </a:solidFill>
+          <a:ln>
+            <a:solidFill>
+              <a:srgbClr val="D64545"/>
+            </a:solidFill>
+          </a:ln>
+          <a:effectLst/>
+        </p:spPr>
+        <p:style>
+          <a:lnRef idx="1">
+            <a:schemeClr val="accent1"/>
+          </a:lnRef>
+          <a:fillRef idx="3">
+            <a:schemeClr val="accent1"/>
+          </a:fillRef>
+          <a:effectRef idx="2">
+            <a:schemeClr val="accent1"/>
+          </a:effectRef>
+          <a:fontRef idx="minor">
+            <a:schemeClr val="lt1"/>
+          </a:fontRef>
+        </p:style>
+        <p:txBody>
+          <a:bodyPr rtlCol="0" anchor="ctr" wrap="square"/>
+          <a:lstStyle/>
+          <a:p>
+            <a:pPr algn="ctr"/>
+            <a:r>
+              <a:rPr sz="900" b="1">
+                <a:solidFill>
+                  <a:srgbClr val="FFFFFF"/>
+                </a:solidFill>
+                <a:latin typeface="맑은 고딕"/>
+              </a:rPr>
+              <a:t>PROD</a:t>
+            </a:r>
+          </a:p>
+        </p:txBody>
+      </p:sp>
+      <p:sp>
+        <p:nvSpPr>
+          <p:cNvPr id="30" name="TextBox 29"/>
+          <p:cNvSpPr txBox="1"/>
+          <p:nvPr/>
+        </p:nvSpPr>
+        <p:spPr>
+          <a:xfrm>
+            <a:off x="3879668" y="3703320"/>
+            <a:ext cx="1436914" cy="274320"/>
+          </a:xfrm>
+          <a:prstGeom prst="rect">
+            <a:avLst/>
+          </a:prstGeom>
+          <a:noFill/>
+        </p:spPr>
+        <p:txBody>
+          <a:bodyPr wrap="square">
+            <a:spAutoFit/>
+          </a:bodyPr>
+          <a:lstStyle/>
+          <a:p>
+            <a:pPr algn="l"/>
+            <a:r>
+              <a:rPr sz="1100" b="0">
+                <a:solidFill>
+                  <a:srgbClr val="1F2937"/>
+                </a:solidFill>
+                <a:latin typeface="맑은 고딕"/>
+              </a:rPr>
+              <a:t>1</a:t>
+            </a:r>
+          </a:p>
+        </p:txBody>
+      </p:sp>
+      <p:sp>
+        <p:nvSpPr>
+          <p:cNvPr id="31" name="TextBox 30"/>
+          <p:cNvSpPr txBox="1"/>
+          <p:nvPr/>
+        </p:nvSpPr>
+        <p:spPr>
+          <a:xfrm>
+            <a:off x="5316582" y="3703320"/>
+            <a:ext cx="1436914" cy="274320"/>
+          </a:xfrm>
+          <a:prstGeom prst="rect">
+            <a:avLst/>
+          </a:prstGeom>
+          <a:noFill/>
+        </p:spPr>
+        <p:txBody>
+          <a:bodyPr wrap="square">
+            <a:spAutoFit/>
+          </a:bodyPr>
+          <a:lstStyle/>
+          <a:p>
+            <a:pPr algn="l"/>
+            <a:r>
+              <a:rPr sz="1100" b="0">
+                <a:solidFill>
+                  <a:srgbClr val="1F2937"/>
+                </a:solidFill>
+                <a:latin typeface="맑은 고딕"/>
+              </a:rPr>
+              <a:t>40001</a:t>
+            </a:r>
+          </a:p>
+        </p:txBody>
+      </p:sp>
+      <p:sp>
+        <p:nvSpPr>
+          <p:cNvPr id="32" name="TextBox 31"/>
+          <p:cNvSpPr txBox="1"/>
+          <p:nvPr/>
+        </p:nvSpPr>
+        <p:spPr>
+          <a:xfrm>
+            <a:off x="6753497" y="3703320"/>
+            <a:ext cx="1436914" cy="274320"/>
+          </a:xfrm>
+          <a:prstGeom prst="rect">
+            <a:avLst/>
+          </a:prstGeom>
+          <a:noFill/>
+        </p:spPr>
+        <p:txBody>
+          <a:bodyPr wrap="square">
+            <a:spAutoFit/>
+          </a:bodyPr>
+          <a:lstStyle/>
+          <a:p>
+            <a:pPr algn="l"/>
+            <a:r>
+              <a:rPr sz="1100" b="0">
+                <a:solidFill>
+                  <a:srgbClr val="1F2937"/>
+                </a:solidFill>
+                <a:latin typeface="맑은 고딕"/>
+              </a:rPr>
+              <a:t>50001</a:t>
+            </a:r>
+          </a:p>
+        </p:txBody>
+      </p:sp>
+      <p:sp>
+        <p:nvSpPr>
+          <p:cNvPr id="33" name="TextBox 32"/>
+          <p:cNvSpPr txBox="1"/>
+          <p:nvPr/>
+        </p:nvSpPr>
+        <p:spPr>
+          <a:xfrm>
+            <a:off x="8190411" y="3703320"/>
+            <a:ext cx="1436914" cy="274320"/>
+          </a:xfrm>
+          <a:prstGeom prst="rect">
+            <a:avLst/>
+          </a:prstGeom>
+          <a:noFill/>
+        </p:spPr>
+        <p:txBody>
+          <a:bodyPr wrap="square">
+            <a:spAutoFit/>
+          </a:bodyPr>
+          <a:lstStyle/>
+          <a:p>
+            <a:pPr algn="l"/>
+            <a:r>
+              <a:rPr sz="1100" b="0">
+                <a:solidFill>
+                  <a:srgbClr val="1F2937"/>
+                </a:solidFill>
+                <a:latin typeface="맑은 고딕"/>
+              </a:rPr>
+              <a:t>10.0.0.11</a:t>
+            </a:r>
+          </a:p>
+        </p:txBody>
+      </p:sp>
+      <p:sp>
+        <p:nvSpPr>
+          <p:cNvPr id="34" name="Rounded Rectangle 33"/>
+          <p:cNvSpPr/>
+          <p:nvPr/>
+        </p:nvSpPr>
+        <p:spPr>
+          <a:xfrm>
+            <a:off x="9627325" y="3703320"/>
+            <a:ext cx="822960" cy="274320"/>
+          </a:xfrm>
+          <a:prstGeom prst="roundRect">
+            <a:avLst/>
+          </a:prstGeom>
+          <a:solidFill>
+            <a:srgbClr val="1E7A34"/>
+          </a:solidFill>
+          <a:ln>
+            <a:solidFill>
+              <a:srgbClr val="1E7A34"/>
+            </a:solidFill>
+          </a:ln>
+          <a:effectLst/>
+        </p:spPr>
+        <p:style>
+          <a:lnRef idx="1">
+            <a:schemeClr val="accent1"/>
+          </a:lnRef>
+          <a:fillRef idx="3">
+            <a:schemeClr val="accent1"/>
+          </a:fillRef>
+          <a:effectRef idx="2">
+            <a:schemeClr val="accent1"/>
+          </a:effectRef>
+          <a:fontRef idx="minor">
+            <a:schemeClr val="lt1"/>
+          </a:fontRef>
+        </p:style>
+        <p:txBody>
+          <a:bodyPr rtlCol="0" anchor="ctr" wrap="square"/>
+          <a:lstStyle/>
+          <a:p>
+            <a:pPr algn="ctr"/>
+            <a:r>
+              <a:rPr sz="900" b="1">
+                <a:solidFill>
+                  <a:srgbClr val="FFFFFF"/>
+                </a:solidFill>
+                <a:latin typeface="맑은 고딕"/>
+              </a:rPr>
+              <a:t>실행중</a:t>
+            </a:r>
+          </a:p>
+        </p:txBody>
+      </p:sp>
+      <p:sp>
+        <p:nvSpPr>
+          <p:cNvPr id="35" name="TextBox 34"/>
+          <p:cNvSpPr txBox="1"/>
+          <p:nvPr/>
+        </p:nvSpPr>
+        <p:spPr>
+          <a:xfrm>
+            <a:off x="1005840" y="4087368"/>
+            <a:ext cx="1436914" cy="274320"/>
+          </a:xfrm>
+          <a:prstGeom prst="rect">
+            <a:avLst/>
+          </a:prstGeom>
+          <a:noFill/>
+        </p:spPr>
+        <p:txBody>
+          <a:bodyPr wrap="square">
+            <a:spAutoFit/>
+          </a:bodyPr>
+          <a:lstStyle/>
+          <a:p>
+            <a:pPr algn="l"/>
+            <a:r>
+              <a:rPr sz="1100" b="0">
+                <a:solidFill>
+                  <a:srgbClr val="1F2937"/>
+                </a:solidFill>
+                <a:latin typeface="맑은 고딕"/>
+              </a:rPr>
+              <a:t>5500100002</a:t>
+            </a:r>
+          </a:p>
+        </p:txBody>
+      </p:sp>
+      <p:sp>
+        <p:nvSpPr>
+          <p:cNvPr id="36" name="Rounded Rectangle 35"/>
+          <p:cNvSpPr/>
+          <p:nvPr/>
+        </p:nvSpPr>
+        <p:spPr>
+          <a:xfrm>
+            <a:off x="2442754" y="4087368"/>
+            <a:ext cx="640080" cy="274320"/>
+          </a:xfrm>
+          <a:prstGeom prst="roundRect">
+            <a:avLst/>
+          </a:prstGeom>
+          <a:solidFill>
+            <a:srgbClr val="4A7FD6"/>
+          </a:solidFill>
+          <a:ln>
+            <a:solidFill>
+              <a:srgbClr val="4A7FD6"/>
+            </a:solidFill>
+          </a:ln>
+          <a:effectLst/>
+        </p:spPr>
+        <p:style>
+          <a:lnRef idx="1">
+            <a:schemeClr val="accent1"/>
+          </a:lnRef>
+          <a:fillRef idx="3">
+            <a:schemeClr val="accent1"/>
+          </a:fillRef>
+          <a:effectRef idx="2">
+            <a:schemeClr val="accent1"/>
+          </a:effectRef>
+          <a:fontRef idx="minor">
+            <a:schemeClr val="lt1"/>
+          </a:fontRef>
+        </p:style>
+        <p:txBody>
+          <a:bodyPr rtlCol="0" anchor="ctr" wrap="square"/>
+          <a:lstStyle/>
+          <a:p>
+            <a:pPr algn="ctr"/>
+            <a:r>
+              <a:rPr sz="900" b="1">
+                <a:solidFill>
+                  <a:srgbClr val="FFFFFF"/>
+                </a:solidFill>
+                <a:latin typeface="맑은 고딕"/>
+              </a:rPr>
+              <a:t>DEV</a:t>
+            </a:r>
+          </a:p>
+        </p:txBody>
+      </p:sp>
+      <p:sp>
+        <p:nvSpPr>
+          <p:cNvPr id="37" name="TextBox 36"/>
+          <p:cNvSpPr txBox="1"/>
+          <p:nvPr/>
+        </p:nvSpPr>
+        <p:spPr>
+          <a:xfrm>
+            <a:off x="3879668" y="4087368"/>
+            <a:ext cx="1436914" cy="274320"/>
+          </a:xfrm>
+          <a:prstGeom prst="rect">
+            <a:avLst/>
+          </a:prstGeom>
+          <a:noFill/>
+        </p:spPr>
+        <p:txBody>
+          <a:bodyPr wrap="square">
+            <a:spAutoFit/>
+          </a:bodyPr>
+          <a:lstStyle/>
+          <a:p>
+            <a:pPr algn="l"/>
+            <a:r>
+              <a:rPr sz="1100" b="0">
+                <a:solidFill>
+                  <a:srgbClr val="1F2937"/>
+                </a:solidFill>
+                <a:latin typeface="맑은 고딕"/>
+              </a:rPr>
+              <a:t>1</a:t>
+            </a:r>
+          </a:p>
+        </p:txBody>
+      </p:sp>
+      <p:sp>
+        <p:nvSpPr>
+          <p:cNvPr id="38" name="TextBox 37"/>
+          <p:cNvSpPr txBox="1"/>
+          <p:nvPr/>
+        </p:nvSpPr>
+        <p:spPr>
+          <a:xfrm>
+            <a:off x="5316582" y="4087368"/>
+            <a:ext cx="1436914" cy="274320"/>
+          </a:xfrm>
+          <a:prstGeom prst="rect">
+            <a:avLst/>
+          </a:prstGeom>
+          <a:noFill/>
+        </p:spPr>
+        <p:txBody>
+          <a:bodyPr wrap="square">
+            <a:spAutoFit/>
+          </a:bodyPr>
+          <a:lstStyle/>
+          <a:p>
+            <a:pPr algn="l"/>
+            <a:r>
+              <a:rPr sz="1100" b="0">
+                <a:solidFill>
+                  <a:srgbClr val="1F2937"/>
+                </a:solidFill>
+                <a:latin typeface="맑은 고딕"/>
+              </a:rPr>
+              <a:t>40002</a:t>
+            </a:r>
+          </a:p>
+        </p:txBody>
+      </p:sp>
+      <p:sp>
+        <p:nvSpPr>
+          <p:cNvPr id="39" name="TextBox 38"/>
+          <p:cNvSpPr txBox="1"/>
+          <p:nvPr/>
+        </p:nvSpPr>
+        <p:spPr>
+          <a:xfrm>
+            <a:off x="6753497" y="4087368"/>
+            <a:ext cx="1436914" cy="274320"/>
+          </a:xfrm>
+          <a:prstGeom prst="rect">
+            <a:avLst/>
+          </a:prstGeom>
+          <a:noFill/>
+        </p:spPr>
+        <p:txBody>
+          <a:bodyPr wrap="square">
+            <a:spAutoFit/>
+          </a:bodyPr>
+          <a:lstStyle/>
+          <a:p>
+            <a:pPr algn="l"/>
+            <a:r>
+              <a:rPr sz="1100" b="0">
+                <a:solidFill>
+                  <a:srgbClr val="1F2937"/>
+                </a:solidFill>
+                <a:latin typeface="맑은 고딕"/>
+              </a:rPr>
+              <a:t>50002</a:t>
+            </a:r>
+          </a:p>
+        </p:txBody>
+      </p:sp>
+      <p:sp>
+        <p:nvSpPr>
+          <p:cNvPr id="40" name="TextBox 39"/>
+          <p:cNvSpPr txBox="1"/>
+          <p:nvPr/>
+        </p:nvSpPr>
+        <p:spPr>
+          <a:xfrm>
+            <a:off x="8190411" y="4087368"/>
+            <a:ext cx="1436914" cy="274320"/>
+          </a:xfrm>
+          <a:prstGeom prst="rect">
+            <a:avLst/>
+          </a:prstGeom>
+          <a:noFill/>
+        </p:spPr>
+        <p:txBody>
+          <a:bodyPr wrap="square">
+            <a:spAutoFit/>
+          </a:bodyPr>
+          <a:lstStyle/>
+          <a:p>
+            <a:pPr algn="l"/>
+            <a:r>
+              <a:rPr sz="1100" b="0">
+                <a:solidFill>
+                  <a:srgbClr val="1F2937"/>
+                </a:solidFill>
+                <a:latin typeface="맑은 고딕"/>
+              </a:rPr>
+              <a:t>10.0.0.12</a:t>
+            </a:r>
+          </a:p>
+        </p:txBody>
+      </p:sp>
+      <p:sp>
+        <p:nvSpPr>
+          <p:cNvPr id="41" name="Rounded Rectangle 40"/>
+          <p:cNvSpPr/>
+          <p:nvPr/>
+        </p:nvSpPr>
+        <p:spPr>
+          <a:xfrm>
+            <a:off x="9627325" y="4087368"/>
+            <a:ext cx="822960" cy="274320"/>
+          </a:xfrm>
+          <a:prstGeom prst="roundRect">
+            <a:avLst/>
+          </a:prstGeom>
+          <a:solidFill>
+            <a:srgbClr val="1E7A34"/>
+          </a:solidFill>
+          <a:ln>
+            <a:solidFill>
+              <a:srgbClr val="1E7A34"/>
+            </a:solidFill>
+          </a:ln>
+          <a:effectLst/>
+        </p:spPr>
+        <p:style>
+          <a:lnRef idx="1">
+            <a:schemeClr val="accent1"/>
+          </a:lnRef>
+          <a:fillRef idx="3">
+            <a:schemeClr val="accent1"/>
+          </a:fillRef>
+          <a:effectRef idx="2">
+            <a:schemeClr val="accent1"/>
+          </a:effectRef>
+          <a:fontRef idx="minor">
+            <a:schemeClr val="lt1"/>
+          </a:fontRef>
+        </p:style>
+        <p:txBody>
+          <a:bodyPr rtlCol="0" anchor="ctr" wrap="square"/>
+          <a:lstStyle/>
+          <a:p>
+            <a:pPr algn="ctr"/>
+            <a:r>
+              <a:rPr sz="900" b="1">
+                <a:solidFill>
+                  <a:srgbClr val="FFFFFF"/>
+                </a:solidFill>
+                <a:latin typeface="맑은 고딕"/>
+              </a:rPr>
+              <a:t>실행중</a:t>
+            </a:r>
+          </a:p>
+        </p:txBody>
+      </p:sp>
+      <p:sp>
+        <p:nvSpPr>
+          <p:cNvPr id="42" name="TextBox 41"/>
+          <p:cNvSpPr txBox="1"/>
+          <p:nvPr/>
+        </p:nvSpPr>
+        <p:spPr>
+          <a:xfrm>
+            <a:off x="1005840" y="4471416"/>
+            <a:ext cx="1436914" cy="274320"/>
+          </a:xfrm>
+          <a:prstGeom prst="rect">
+            <a:avLst/>
+          </a:prstGeom>
+          <a:noFill/>
+        </p:spPr>
+        <p:txBody>
+          <a:bodyPr wrap="square">
+            <a:spAutoFit/>
+          </a:bodyPr>
+          <a:lstStyle/>
+          <a:p>
+            <a:pPr algn="l"/>
+            <a:r>
+              <a:rPr sz="1100" b="0">
+                <a:solidFill>
+                  <a:srgbClr val="1F2937"/>
+                </a:solidFill>
+                <a:latin typeface="맑은 고딕"/>
+              </a:rPr>
+              <a:t>5500100003</a:t>
+            </a:r>
+          </a:p>
+        </p:txBody>
+      </p:sp>
+      <p:sp>
+        <p:nvSpPr>
+          <p:cNvPr id="43" name="Rounded Rectangle 42"/>
+          <p:cNvSpPr/>
+          <p:nvPr/>
+        </p:nvSpPr>
+        <p:spPr>
+          <a:xfrm>
+            <a:off x="2442754" y="4471416"/>
+            <a:ext cx="640080" cy="274320"/>
+          </a:xfrm>
+          <a:prstGeom prst="roundRect">
+            <a:avLst/>
+          </a:prstGeom>
+          <a:solidFill>
+            <a:srgbClr val="D64545"/>
+          </a:solidFill>
+          <a:ln>
+            <a:solidFill>
+              <a:srgbClr val="D64545"/>
+            </a:solidFill>
+          </a:ln>
+          <a:effectLst/>
+        </p:spPr>
+        <p:style>
+          <a:lnRef idx="1">
+            <a:schemeClr val="accent1"/>
+          </a:lnRef>
+          <a:fillRef idx="3">
+            <a:schemeClr val="accent1"/>
+          </a:fillRef>
+          <a:effectRef idx="2">
+            <a:schemeClr val="accent1"/>
+          </a:effectRef>
+          <a:fontRef idx="minor">
+            <a:schemeClr val="lt1"/>
+          </a:fontRef>
+        </p:style>
+        <p:txBody>
+          <a:bodyPr rtlCol="0" anchor="ctr" wrap="square"/>
+          <a:lstStyle/>
+          <a:p>
+            <a:pPr algn="ctr"/>
+            <a:r>
+              <a:rPr sz="900" b="1">
+                <a:solidFill>
+                  <a:srgbClr val="FFFFFF"/>
+                </a:solidFill>
+                <a:latin typeface="맑은 고딕"/>
+              </a:rPr>
+              <a:t>PROD</a:t>
+            </a:r>
+          </a:p>
+        </p:txBody>
+      </p:sp>
+      <p:sp>
+        <p:nvSpPr>
+          <p:cNvPr id="44" name="TextBox 43"/>
+          <p:cNvSpPr txBox="1"/>
+          <p:nvPr/>
+        </p:nvSpPr>
+        <p:spPr>
+          <a:xfrm>
+            <a:off x="3879668" y="4471416"/>
+            <a:ext cx="1436914" cy="274320"/>
+          </a:xfrm>
+          <a:prstGeom prst="rect">
+            <a:avLst/>
+          </a:prstGeom>
+          <a:noFill/>
+        </p:spPr>
+        <p:txBody>
+          <a:bodyPr wrap="square">
+            <a:spAutoFit/>
+          </a:bodyPr>
+          <a:lstStyle/>
+          <a:p>
+            <a:pPr algn="l"/>
+            <a:r>
+              <a:rPr sz="1100" b="0">
+                <a:solidFill>
+                  <a:srgbClr val="1F2937"/>
+                </a:solidFill>
+                <a:latin typeface="맑은 고딕"/>
+              </a:rPr>
+              <a:t>2</a:t>
+            </a:r>
+          </a:p>
+        </p:txBody>
+      </p:sp>
+      <p:sp>
+        <p:nvSpPr>
+          <p:cNvPr id="45" name="TextBox 44"/>
+          <p:cNvSpPr txBox="1"/>
+          <p:nvPr/>
+        </p:nvSpPr>
+        <p:spPr>
+          <a:xfrm>
+            <a:off x="5316582" y="4471416"/>
+            <a:ext cx="1436914" cy="274320"/>
+          </a:xfrm>
+          <a:prstGeom prst="rect">
+            <a:avLst/>
+          </a:prstGeom>
+          <a:noFill/>
+        </p:spPr>
+        <p:txBody>
+          <a:bodyPr wrap="square">
+            <a:spAutoFit/>
+          </a:bodyPr>
+          <a:lstStyle/>
+          <a:p>
+            <a:pPr algn="l"/>
+            <a:r>
+              <a:rPr sz="1100" b="0">
+                <a:solidFill>
+                  <a:srgbClr val="1F2937"/>
+                </a:solidFill>
+                <a:latin typeface="맑은 고딕"/>
+              </a:rPr>
+              <a:t>40003</a:t>
+            </a:r>
+          </a:p>
+        </p:txBody>
+      </p:sp>
+      <p:sp>
+        <p:nvSpPr>
+          <p:cNvPr id="46" name="TextBox 45"/>
+          <p:cNvSpPr txBox="1"/>
+          <p:nvPr/>
+        </p:nvSpPr>
+        <p:spPr>
+          <a:xfrm>
+            <a:off x="6753497" y="4471416"/>
+            <a:ext cx="1436914" cy="274320"/>
+          </a:xfrm>
+          <a:prstGeom prst="rect">
+            <a:avLst/>
+          </a:prstGeom>
+          <a:noFill/>
+        </p:spPr>
+        <p:txBody>
+          <a:bodyPr wrap="square">
+            <a:spAutoFit/>
+          </a:bodyPr>
+          <a:lstStyle/>
+          <a:p>
+            <a:pPr algn="l"/>
+            <a:r>
+              <a:rPr sz="1100" b="0">
+                <a:solidFill>
+                  <a:srgbClr val="1F2937"/>
+                </a:solidFill>
+                <a:latin typeface="맑은 고딕"/>
+              </a:rPr>
+              <a:t>50003</a:t>
+            </a:r>
+          </a:p>
+        </p:txBody>
+      </p:sp>
+      <p:sp>
+        <p:nvSpPr>
+          <p:cNvPr id="47" name="TextBox 46"/>
+          <p:cNvSpPr txBox="1"/>
+          <p:nvPr/>
+        </p:nvSpPr>
+        <p:spPr>
+          <a:xfrm>
+            <a:off x="8190411" y="4471416"/>
+            <a:ext cx="1436914" cy="274320"/>
+          </a:xfrm>
+          <a:prstGeom prst="rect">
+            <a:avLst/>
+          </a:prstGeom>
+          <a:noFill/>
+        </p:spPr>
+        <p:txBody>
+          <a:bodyPr wrap="square">
+            <a:spAutoFit/>
+          </a:bodyPr>
+          <a:lstStyle/>
+          <a:p>
+            <a:pPr algn="l"/>
+            <a:r>
+              <a:rPr sz="1100" b="0">
+                <a:solidFill>
+                  <a:srgbClr val="1F2937"/>
+                </a:solidFill>
+                <a:latin typeface="맑은 고딕"/>
+              </a:rPr>
+              <a:t>10.0.0.11</a:t>
+            </a:r>
+          </a:p>
+        </p:txBody>
+      </p:sp>
+      <p:sp>
+        <p:nvSpPr>
+          <p:cNvPr id="48" name="Rounded Rectangle 47"/>
+          <p:cNvSpPr/>
+          <p:nvPr/>
+        </p:nvSpPr>
+        <p:spPr>
+          <a:xfrm>
+            <a:off x="9627325" y="4471416"/>
+            <a:ext cx="822960" cy="274320"/>
+          </a:xfrm>
+          <a:prstGeom prst="roundRect">
+            <a:avLst/>
+          </a:prstGeom>
+          <a:solidFill>
+            <a:srgbClr val="555555"/>
+          </a:solidFill>
+          <a:ln>
+            <a:solidFill>
+              <a:srgbClr val="555555"/>
+            </a:solidFill>
+          </a:ln>
+          <a:effectLst/>
+        </p:spPr>
+        <p:style>
+          <a:lnRef idx="1">
+            <a:schemeClr val="accent1"/>
+          </a:lnRef>
+          <a:fillRef idx="3">
+            <a:schemeClr val="accent1"/>
+          </a:fillRef>
+          <a:effectRef idx="2">
+            <a:schemeClr val="accent1"/>
+          </a:effectRef>
+          <a:fontRef idx="minor">
+            <a:schemeClr val="lt1"/>
+          </a:fontRef>
+        </p:style>
+        <p:txBody>
+          <a:bodyPr rtlCol="0" anchor="ctr" wrap="square"/>
+          <a:lstStyle/>
+          <a:p>
+            <a:pPr algn="ctr"/>
+            <a:r>
+              <a:rPr sz="900" b="1">
+                <a:solidFill>
+                  <a:srgbClr val="FFFFFF"/>
+                </a:solidFill>
+                <a:latin typeface="맑은 고딕"/>
+              </a:rPr>
+              <a:t>중지됨</a:t>
+            </a:r>
+          </a:p>
+        </p:txBody>
+      </p:sp>
+      <p:sp>
+        <p:nvSpPr>
+          <p:cNvPr id="49" name="TextBox 48"/>
+          <p:cNvSpPr txBox="1"/>
+          <p:nvPr/>
+        </p:nvSpPr>
+        <p:spPr>
+          <a:xfrm>
+            <a:off x="640080" y="5989320"/>
+            <a:ext cx="10881360" cy="365760"/>
+          </a:xfrm>
+          <a:prstGeom prst="rect">
+            <a:avLst/>
+          </a:prstGeom>
+          <a:noFill/>
+        </p:spPr>
+        <p:txBody>
+          <a:bodyPr wrap="square">
+            <a:spAutoFit/>
+          </a:bodyPr>
+          <a:lstStyle/>
+          <a:p>
+            <a:pPr algn="l"/>
+            <a:r>
+              <a:rPr sz="1100" b="0">
+                <a:solidFill>
+                  <a:srgbClr val="555555"/>
+                </a:solidFill>
+                <a:latin typeface="맑은 고딕"/>
+              </a:rPr>
+              <a:t>※ ID·IP·포트는 전부 예시 데이터이며, 실제 화면 레이아웃/컴포넌트 구성을 그대로 재현했습니다.</a:t>
+            </a:r>
+          </a:p>
+        </p:txBody>
+      </p:sp>
+      <p:sp>
+        <p:nvSpPr>
+          <p:cNvPr id="50" name="TextBox 49"/>
+          <p:cNvSpPr txBox="1"/>
+          <p:nvPr/>
+        </p:nvSpPr>
+        <p:spPr>
+          <a:xfrm>
+            <a:off x="457200" y="6473952"/>
+            <a:ext cx="5486400" cy="320040"/>
+          </a:xfrm>
+          <a:prstGeom prst="rect">
+            <a:avLst/>
+          </a:prstGeom>
+          <a:noFill/>
+        </p:spPr>
+        <p:txBody>
+          <a:bodyPr wrap="square">
+            <a:spAutoFit/>
+          </a:bodyPr>
+          <a:lstStyle/>
+          <a:p>
+            <a:pPr algn="l"/>
+            <a:r>
               <a:rPr sz="1000" b="0">
                 <a:solidFill>
                   <a:srgbClr val="999999"/>
@@ -7824,7 +9813,7 @@
       </p:sp>
       <p:sp>
         <p:nvSpPr>
-          <p:cNvPr id="18" name="TextBox 17"/>
+          <p:cNvPr id="51" name="TextBox 50"/>
           <p:cNvSpPr txBox="1"/>
           <p:nvPr/>
         </p:nvSpPr>
@@ -7993,7 +9982,7 @@
                 </a:solidFill>
                 <a:latin typeface="맑은 고딕"/>
               </a:rPr>
-              <a:t>Case 1 · JS 동적 폼에서만 발생하는 403 CSRF 오류</a:t>
+              <a:t>핵심 성과</a:t>
             </a:r>
           </a:p>
         </p:txBody>
@@ -8006,18 +9995,18 @@
         </p:nvSpPr>
         <p:spPr>
           <a:xfrm>
-            <a:off x="640080" y="1463040"/>
-            <a:ext cx="1188720" cy="502920"/>
+            <a:off x="640080" y="1554480"/>
+            <a:ext cx="548640" cy="548640"/>
           </a:xfrm>
           <a:prstGeom prst="roundRect">
             <a:avLst/>
           </a:prstGeom>
           <a:solidFill>
-            <a:srgbClr val="4A7FD6"/>
+            <a:srgbClr val="2F6FED"/>
           </a:solidFill>
           <a:ln>
             <a:solidFill>
-              <a:srgbClr val="4A7FD6"/>
+              <a:srgbClr val="2F6FED"/>
             </a:solidFill>
           </a:ln>
           <a:effectLst/>
@@ -8042,13 +10031,13 @@
           <a:p>
             <a:pPr algn="ctr"/>
             <a:r>
-              <a:rPr sz="1300" b="1">
+              <a:rPr sz="1800" b="1">
                 <a:solidFill>
                   <a:srgbClr val="FFFFFF"/>
                 </a:solidFill>
                 <a:latin typeface="맑은 고딕"/>
               </a:rPr>
-              <a:t>상황</a:t>
+              <a:t>1</a:t>
             </a:r>
           </a:p>
         </p:txBody>
@@ -8061,8 +10050,8 @@
         </p:nvSpPr>
         <p:spPr>
           <a:xfrm>
-            <a:off x="2011680" y="1444752"/>
-            <a:ext cx="9418320" cy="914400"/>
+            <a:off x="1371600" y="1581912"/>
+            <a:ext cx="10058400" cy="685800"/>
           </a:xfrm>
           <a:prstGeom prst="rect">
             <a:avLst/>
@@ -8077,13 +10066,13 @@
           <a:p>
             <a:pPr algn="l"/>
             <a:r>
-              <a:rPr sz="1500" b="0">
+              <a:rPr sz="1600" b="0">
                 <a:solidFill>
                   <a:srgbClr val="1F2937"/>
                 </a:solidFill>
                 <a:latin typeface="맑은 고딕"/>
               </a:rPr>
-              <a:t>관리 화면 '실행' 버튼만 항상 403 발생 — 서버 렌더링 폼(삭제 버튼 등)은 정상</a:t>
+              <a:t>가동/중지, 신규 등록, 삭제를 웹 UI에서 원클릭으로 처리 — 서버별 SSH 접속 불필요</a:t>
             </a:r>
           </a:p>
         </p:txBody>
@@ -8096,18 +10085,18 @@
         </p:nvSpPr>
         <p:spPr>
           <a:xfrm>
-            <a:off x="640080" y="2514600"/>
-            <a:ext cx="1188720" cy="502920"/>
+            <a:off x="640080" y="2331720"/>
+            <a:ext cx="548640" cy="548640"/>
           </a:xfrm>
           <a:prstGeom prst="roundRect">
             <a:avLst/>
           </a:prstGeom>
           <a:solidFill>
-            <a:srgbClr val="D64545"/>
+            <a:srgbClr val="2F6FED"/>
           </a:solidFill>
           <a:ln>
             <a:solidFill>
-              <a:srgbClr val="D64545"/>
+              <a:srgbClr val="2F6FED"/>
             </a:solidFill>
           </a:ln>
           <a:effectLst/>
@@ -8132,13 +10121,13 @@
           <a:p>
             <a:pPr algn="ctr"/>
             <a:r>
-              <a:rPr sz="1300" b="1">
+              <a:rPr sz="1800" b="1">
                 <a:solidFill>
                   <a:srgbClr val="FFFFFF"/>
                 </a:solidFill>
                 <a:latin typeface="맑은 고딕"/>
               </a:rPr>
-              <a:t>원인</a:t>
+              <a:t>2</a:t>
             </a:r>
           </a:p>
         </p:txBody>
@@ -8151,8 +10140,8 @@
         </p:nvSpPr>
         <p:spPr>
           <a:xfrm>
-            <a:off x="2011680" y="2496312"/>
-            <a:ext cx="9418320" cy="914400"/>
+            <a:off x="1371600" y="2359152"/>
+            <a:ext cx="10058400" cy="685800"/>
           </a:xfrm>
           <a:prstGeom prst="rect">
             <a:avLst/>
@@ -8167,13 +10156,13 @@
           <a:p>
             <a:pPr algn="l"/>
             <a:r>
-              <a:rPr sz="1500" b="0">
+              <a:rPr sz="1600" b="0">
                 <a:solidFill>
                   <a:srgbClr val="1F2937"/>
                 </a:solidFill>
                 <a:latin typeface="맑은 고딕"/>
               </a:rPr>
-              <a:t>document.createElement('form')으로 즉석 생성한 폼에는 Spring Security가 자동으로 넣어주는 CSRF 히든 필드가 없었음</a:t>
+              <a:t>인스턴스 확장 가능한 구조 설계 (Server가 DB 기반 라우팅 테이블로 물리 서버 위치 관리)</a:t>
             </a:r>
           </a:p>
         </p:txBody>
@@ -8186,18 +10175,18 @@
         </p:nvSpPr>
         <p:spPr>
           <a:xfrm>
-            <a:off x="640080" y="3566160"/>
-            <a:ext cx="1188720" cy="502920"/>
+            <a:off x="640080" y="3108960"/>
+            <a:ext cx="548640" cy="548640"/>
           </a:xfrm>
           <a:prstGeom prst="roundRect">
             <a:avLst/>
           </a:prstGeom>
           <a:solidFill>
-            <a:srgbClr val="1E7A34"/>
+            <a:srgbClr val="2F6FED"/>
           </a:solidFill>
           <a:ln>
             <a:solidFill>
-              <a:srgbClr val="1E7A34"/>
+              <a:srgbClr val="2F6FED"/>
             </a:solidFill>
           </a:ln>
           <a:effectLst/>
@@ -8222,13 +10211,13 @@
           <a:p>
             <a:pPr algn="ctr"/>
             <a:r>
-              <a:rPr sz="1300" b="1">
+              <a:rPr sz="1800" b="1">
                 <a:solidFill>
                   <a:srgbClr val="FFFFFF"/>
                 </a:solidFill>
                 <a:latin typeface="맑은 고딕"/>
               </a:rPr>
-              <a:t>해결</a:t>
+              <a:t>3</a:t>
             </a:r>
           </a:p>
         </p:txBody>
@@ -8241,8 +10230,8 @@
         </p:nvSpPr>
         <p:spPr>
           <a:xfrm>
-            <a:off x="2011680" y="3547872"/>
-            <a:ext cx="9418320" cy="914400"/>
+            <a:off x="1371600" y="3136392"/>
+            <a:ext cx="10058400" cy="685800"/>
           </a:xfrm>
           <a:prstGeom prst="rect">
             <a:avLst/>
@@ -8257,13 +10246,13 @@
           <a:p>
             <a:pPr algn="l"/>
             <a:r>
-              <a:rPr sz="1500" b="0">
+              <a:rPr sz="1600" b="0">
                 <a:solidFill>
                   <a:srgbClr val="1F2937"/>
                 </a:solidFill>
                 <a:latin typeface="맑은 고딕"/>
               </a:rPr>
-              <a:t>페이지에 이미 렌더링된 다른 폼에서 CSRF 토큰 값을 그대로 읽어와 동적 폼에 추가</a:t>
+              <a:t>자체 TCP 프로토콜로 파일 릴레이 시스템을 처음부터 구현, 운영 실데이터 보호 로직 적용</a:t>
             </a:r>
           </a:p>
         </p:txBody>
@@ -8276,18 +10265,18 @@
         </p:nvSpPr>
         <p:spPr>
           <a:xfrm>
-            <a:off x="640080" y="4617720"/>
-            <a:ext cx="1188720" cy="502920"/>
+            <a:off x="640080" y="3886200"/>
+            <a:ext cx="548640" cy="548640"/>
           </a:xfrm>
           <a:prstGeom prst="roundRect">
             <a:avLst/>
           </a:prstGeom>
           <a:solidFill>
-            <a:srgbClr val="7C3AED"/>
+            <a:srgbClr val="2F6FED"/>
           </a:solidFill>
           <a:ln>
             <a:solidFill>
-              <a:srgbClr val="7C3AED"/>
+              <a:srgbClr val="2F6FED"/>
             </a:solidFill>
           </a:ln>
           <a:effectLst/>
@@ -8312,13 +10301,13 @@
           <a:p>
             <a:pPr algn="ctr"/>
             <a:r>
-              <a:rPr sz="1300" b="1">
+              <a:rPr sz="1800" b="1">
                 <a:solidFill>
                   <a:srgbClr val="FFFFFF"/>
                 </a:solidFill>
                 <a:latin typeface="맑은 고딕"/>
               </a:rPr>
-              <a:t>배운 점</a:t>
+              <a:t>4</a:t>
             </a:r>
           </a:p>
         </p:txBody>
@@ -8331,8 +10320,8 @@
         </p:nvSpPr>
         <p:spPr>
           <a:xfrm>
-            <a:off x="2011680" y="4599432"/>
-            <a:ext cx="9418320" cy="914400"/>
+            <a:off x="1371600" y="3913632"/>
+            <a:ext cx="10058400" cy="685800"/>
           </a:xfrm>
           <a:prstGeom prst="rect">
             <a:avLst/>
@@ -8347,27 +10336,82 @@
           <a:p>
             <a:pPr algn="l"/>
             <a:r>
-              <a:rPr sz="1500" b="0">
+              <a:rPr sz="1600" b="0">
                 <a:solidFill>
                   <a:srgbClr val="1F2937"/>
                 </a:solidFill>
                 <a:latin typeface="맑은 고딕"/>
               </a:rPr>
-              <a:t>재현 안 될 때 테스트 도구 문제로 성급히 결론짓지 않고, 실사용자 환경 증거(접속 로그)로 재검증</a:t>
-            </a:r>
-          </a:p>
-        </p:txBody>
-      </p:sp>
-      <p:sp>
-        <p:nvSpPr>
-          <p:cNvPr id="13" name="TextBox 12"/>
+              <a:t>Prometheus/Grafana 인프라 모니터링에 업무 지표를 자연스럽게 통합</a:t>
+            </a:r>
+          </a:p>
+        </p:txBody>
+      </p:sp>
+      <p:sp>
+        <p:nvSpPr>
+          <p:cNvPr id="13" name="Rounded Rectangle 12"/>
+          <p:cNvSpPr/>
+          <p:nvPr/>
+        </p:nvSpPr>
+        <p:spPr>
+          <a:xfrm>
+            <a:off x="640080" y="4663440"/>
+            <a:ext cx="548640" cy="548640"/>
+          </a:xfrm>
+          <a:prstGeom prst="roundRect">
+            <a:avLst/>
+          </a:prstGeom>
+          <a:solidFill>
+            <a:srgbClr val="2F6FED"/>
+          </a:solidFill>
+          <a:ln>
+            <a:solidFill>
+              <a:srgbClr val="2F6FED"/>
+            </a:solidFill>
+          </a:ln>
+          <a:effectLst/>
+        </p:spPr>
+        <p:style>
+          <a:lnRef idx="1">
+            <a:schemeClr val="accent1"/>
+          </a:lnRef>
+          <a:fillRef idx="3">
+            <a:schemeClr val="accent1"/>
+          </a:fillRef>
+          <a:effectRef idx="2">
+            <a:schemeClr val="accent1"/>
+          </a:effectRef>
+          <a:fontRef idx="minor">
+            <a:schemeClr val="lt1"/>
+          </a:fontRef>
+        </p:style>
+        <p:txBody>
+          <a:bodyPr rtlCol="0" anchor="ctr" wrap="square"/>
+          <a:lstStyle/>
+          <a:p>
+            <a:pPr algn="ctr"/>
+            <a:r>
+              <a:rPr sz="1800" b="1">
+                <a:solidFill>
+                  <a:srgbClr val="FFFFFF"/>
+                </a:solidFill>
+                <a:latin typeface="맑은 고딕"/>
+              </a:rPr>
+              <a:t>5</a:t>
+            </a:r>
+          </a:p>
+        </p:txBody>
+      </p:sp>
+      <p:sp>
+        <p:nvSpPr>
+          <p:cNvPr id="14" name="TextBox 13"/>
           <p:cNvSpPr txBox="1"/>
           <p:nvPr/>
         </p:nvSpPr>
         <p:spPr>
           <a:xfrm>
-            <a:off x="457200" y="6473952"/>
-            <a:ext cx="5486400" cy="320040"/>
+            <a:off x="1371600" y="4690872"/>
+            <a:ext cx="10058400" cy="685800"/>
           </a:xfrm>
           <a:prstGeom prst="rect">
             <a:avLst/>
@@ -8382,6 +10426,131 @@
           <a:p>
             <a:pPr algn="l"/>
             <a:r>
+              <a:rPr sz="1600" b="0">
+                <a:solidFill>
+                  <a:srgbClr val="1F2937"/>
+                </a:solidFill>
+                <a:latin typeface="맑은 고딕"/>
+              </a:rPr>
+              <a:t>상태 폴링 로직에 전이 감지를 추가해 장애 발생 시 개인 메신저로 즉시 알림</a:t>
+            </a:r>
+          </a:p>
+        </p:txBody>
+      </p:sp>
+      <p:sp>
+        <p:nvSpPr>
+          <p:cNvPr id="15" name="Rounded Rectangle 14"/>
+          <p:cNvSpPr/>
+          <p:nvPr/>
+        </p:nvSpPr>
+        <p:spPr>
+          <a:xfrm>
+            <a:off x="640080" y="5440680"/>
+            <a:ext cx="548640" cy="548640"/>
+          </a:xfrm>
+          <a:prstGeom prst="roundRect">
+            <a:avLst/>
+          </a:prstGeom>
+          <a:solidFill>
+            <a:srgbClr val="2F6FED"/>
+          </a:solidFill>
+          <a:ln>
+            <a:solidFill>
+              <a:srgbClr val="2F6FED"/>
+            </a:solidFill>
+          </a:ln>
+          <a:effectLst/>
+        </p:spPr>
+        <p:style>
+          <a:lnRef idx="1">
+            <a:schemeClr val="accent1"/>
+          </a:lnRef>
+          <a:fillRef idx="3">
+            <a:schemeClr val="accent1"/>
+          </a:fillRef>
+          <a:effectRef idx="2">
+            <a:schemeClr val="accent1"/>
+          </a:effectRef>
+          <a:fontRef idx="minor">
+            <a:schemeClr val="lt1"/>
+          </a:fontRef>
+        </p:style>
+        <p:txBody>
+          <a:bodyPr rtlCol="0" anchor="ctr" wrap="square"/>
+          <a:lstStyle/>
+          <a:p>
+            <a:pPr algn="ctr"/>
+            <a:r>
+              <a:rPr sz="1800" b="1">
+                <a:solidFill>
+                  <a:srgbClr val="FFFFFF"/>
+                </a:solidFill>
+                <a:latin typeface="맑은 고딕"/>
+              </a:rPr>
+              <a:t>6</a:t>
+            </a:r>
+          </a:p>
+        </p:txBody>
+      </p:sp>
+      <p:sp>
+        <p:nvSpPr>
+          <p:cNvPr id="16" name="TextBox 15"/>
+          <p:cNvSpPr txBox="1"/>
+          <p:nvPr/>
+        </p:nvSpPr>
+        <p:spPr>
+          <a:xfrm>
+            <a:off x="1371600" y="5468112"/>
+            <a:ext cx="10058400" cy="685800"/>
+          </a:xfrm>
+          <a:prstGeom prst="rect">
+            <a:avLst/>
+          </a:prstGeom>
+          <a:noFill/>
+        </p:spPr>
+        <p:txBody>
+          <a:bodyPr wrap="square">
+            <a:spAutoFit/>
+          </a:bodyPr>
+          <a:lstStyle/>
+          <a:p>
+            <a:pPr algn="l"/>
+            <a:r>
+              <a:rPr sz="1600" b="0">
+                <a:solidFill>
+                  <a:srgbClr val="1F2937"/>
+                </a:solidFill>
+                <a:latin typeface="맑은 고딕"/>
+              </a:rPr>
+              <a:t>동기 블로킹 API를 비동기로 리팩터링해 UI 응답시간을 수십 초 → 0.2초로 단축</a:t>
+            </a:r>
+          </a:p>
+        </p:txBody>
+      </p:sp>
+      <p:sp>
+        <p:nvSpPr>
+          <p:cNvPr id="17" name="TextBox 16"/>
+          <p:cNvSpPr txBox="1"/>
+          <p:nvPr/>
+        </p:nvSpPr>
+        <p:spPr>
+          <a:xfrm>
+            <a:off x="457200" y="6473952"/>
+            <a:ext cx="5486400" cy="320040"/>
+          </a:xfrm>
+          <a:prstGeom prst="rect">
+            <a:avLst/>
+          </a:prstGeom>
+          <a:noFill/>
+        </p:spPr>
+        <p:txBody>
+          <a:bodyPr wrap="square">
+            <a:spAutoFit/>
+          </a:bodyPr>
+          <a:lstStyle/>
+          <a:p>
+            <a:pPr algn="l"/>
+            <a:r>
               <a:rPr sz="1000" b="0">
                 <a:solidFill>
                   <a:srgbClr val="999999"/>
@@ -8395,7 +10564,7 @@
       </p:sp>
       <p:sp>
         <p:nvSpPr>
-          <p:cNvPr id="14" name="TextBox 13"/>
+          <p:cNvPr id="18" name="TextBox 17"/>
           <p:cNvSpPr txBox="1"/>
           <p:nvPr/>
         </p:nvSpPr>
@@ -8564,7 +10733,7 @@
                 </a:solidFill>
                 <a:latin typeface="맑은 고딕"/>
               </a:rPr>
-              <a:t>Case 2 · 컨테이너 기본 시간대(UTC)로 인한 9시간 오차</a:t>
+              <a:t>Case 1 · JS 동적 폼에서만 발생하는 403 CSRF 오류</a:t>
             </a:r>
           </a:p>
         </p:txBody>
@@ -8654,7 +10823,7 @@
                 </a:solidFill>
                 <a:latin typeface="맑은 고딕"/>
               </a:rPr>
-              <a:t>생성 파일의 타임스탬프가 실제 생성 시각과 정확히 9시간(UTC-KST) 차이</a:t>
+              <a:t>관리 화면 '실행' 버튼만 항상 403 발생 — 서버 렌더링 폼(삭제 버튼 등)은 정상</a:t>
             </a:r>
           </a:p>
         </p:txBody>
@@ -8744,7 +10913,7 @@
                 </a:solidFill>
                 <a:latin typeface="맑은 고딕"/>
               </a:rPr>
-              <a:t>컨테이너 베이스 이미지에 TZ 미설정 → LocalDateTime.now()가 UTC 기준으로 동작</a:t>
+              <a:t>document.createElement('form')으로 즉석 생성한 폼에는 Spring Security가 자동으로 넣어주는 CSRF 히든 필드가 없었음</a:t>
             </a:r>
           </a:p>
         </p:txBody>
@@ -8834,7 +11003,7 @@
                 </a:solidFill>
                 <a:latin typeface="맑은 고딕"/>
               </a:rPr>
-              <a:t>ZoneId.of("Asia/Seoul")을 코드에 명시적으로 고정, 컨테이너 설정에 의존하지 않도록 변경</a:t>
+              <a:t>페이지에 이미 렌더링된 다른 폼에서 CSRF 토큰 값을 그대로 읽어와 동적 폼에 추가</a:t>
             </a:r>
           </a:p>
         </p:txBody>
@@ -8924,7 +11093,7 @@
                 </a:solidFill>
                 <a:latin typeface="맑은 고딕"/>
               </a:rPr>
-              <a:t>환경설정 의존 대신 비즈니스 로직에 필요한 시간대는 코드 레벨에서 명시적으로 고정</a:t>
+              <a:t>재현 안 될 때 테스트 도구 문제로 성급히 결론짓지 않고, 실사용자 환경 증거(접속 로그)로 재검증</a:t>
             </a:r>
           </a:p>
         </p:txBody>
@@ -9135,7 +11304,7 @@
                 </a:solidFill>
                 <a:latin typeface="맑은 고딕"/>
               </a:rPr>
-              <a:t>Case 3 · Prometheus 집계 함수 오류로 상태값 오표시</a:t>
+              <a:t>Case 2 · 컨테이너 기본 시간대(UTC)로 인한 9시간 오차</a:t>
             </a:r>
           </a:p>
         </p:txBody>
@@ -9225,7 +11394,7 @@
                 </a:solidFill>
                 <a:latin typeface="맑은 고딕"/>
               </a:rPr>
-              <a:t>정상 실행 중인 컨테이너 상태가 '1(UP)'이 아니라 '2'로 표시</a:t>
+              <a:t>생성 파일의 타임스탬프가 실제 생성 시각과 정확히 9시간(UTC-KST) 차이</a:t>
             </a:r>
           </a:p>
         </p:txBody>
@@ -9315,7 +11484,7 @@
                 </a:solidFill>
                 <a:latin typeface="맑은 고딕"/>
               </a:rPr>
-              <a:t>재시작 시 cAdvisor가 신/구 라벨 조합을 일시적으로 동시 노출 → count()가 라벨 조합 개수를 셈</a:t>
+              <a:t>컨테이너 베이스 이미지에 TZ 미설정 → LocalDateTime.now()가 UTC 기준으로 동작</a:t>
             </a:r>
           </a:p>
         </p:txBody>
@@ -9405,7 +11574,7 @@
                 </a:solidFill>
                 <a:latin typeface="맑은 고딕"/>
               </a:rPr>
-              <a:t>존재 여부 확인 용도이므로 count 대신 group으로 변경 (라벨 카디널리티 변화에 안전)</a:t>
+              <a:t>ZoneId.of("Asia/Seoul")을 코드에 명시적으로 고정, 컨테이너 설정에 의존하지 않도록 변경</a:t>
             </a:r>
           </a:p>
         </p:txBody>
@@ -9495,7 +11664,7 @@
                 </a:solidFill>
                 <a:latin typeface="맑은 고딕"/>
               </a:rPr>
-              <a:t>'몇 개 있는지'가 아니라 '있는지 없는지'를 물을 땐 count보다 group이 안전</a:t>
+              <a:t>환경설정 의존 대신 비즈니스 로직에 필요한 시간대는 코드 레벨에서 명시적으로 고정</a:t>
             </a:r>
           </a:p>
         </p:txBody>
@@ -9706,7 +11875,7 @@
                 </a:solidFill>
                 <a:latin typeface="맑은 고딕"/>
               </a:rPr>
-              <a:t>Case 4 · 인프라 모니터링에 업무 지표 통합</a:t>
+              <a:t>Case 3 · Prometheus 집계 함수 오류로 상태값 오표시</a:t>
             </a:r>
           </a:p>
         </p:txBody>
@@ -9796,7 +11965,7 @@
                 </a:solidFill>
                 <a:latin typeface="맑은 고딕"/>
               </a:rPr>
-              <a:t>CPU/메모리/상태만 보여주던 대시보드에 '오늘 처리 건수'도 같이 보고 싶다는 요구</a:t>
+              <a:t>정상 실행 중인 컨테이너 상태가 '1(UP)'이 아니라 '2'로 표시</a:t>
             </a:r>
           </a:p>
         </p:txBody>
@@ -9886,7 +12055,7 @@
                 </a:solidFill>
                 <a:latin typeface="맑은 고딕"/>
               </a:rPr>
-              <a:t>Prometheus/Grafana 표준 스택엔 업무 지표를 낼 방법이 기본으로 없음</a:t>
+              <a:t>재시작 시 cAdvisor가 신/구 라벨 조합을 일시적으로 동시 노출 → count()가 라벨 조합 개수를 셈</a:t>
             </a:r>
           </a:p>
         </p:txBody>
@@ -9976,7 +12145,7 @@
                 </a:solidFill>
                 <a:latin typeface="맑은 고딕"/>
               </a:rPr>
-              <a:t>node_exporter textfile collector + cron 스크립트로 커스텀 지표 노출, PromQL 'and on(label)'로 유령 데이터(미존재 인스턴스) 필터링</a:t>
+              <a:t>존재 여부 확인 용도이므로 count 대신 group으로 변경 (라벨 카디널리티 변화에 안전)</a:t>
             </a:r>
           </a:p>
         </p:txBody>
@@ -10066,7 +12235,7 @@
                 </a:solidFill>
                 <a:latin typeface="맑은 고딕"/>
               </a:rPr>
-              <a:t>'별도 시스템 필요'라 단정 말고 기존 스택의 확장 포인트를 먼저 탐색</a:t>
+              <a:t>'몇 개 있는지'가 아니라 '있는지 없는지'를 물을 땐 count보다 group이 안전</a:t>
             </a:r>
           </a:p>
         </p:txBody>
@@ -10277,7 +12446,7 @@
                 </a:solidFill>
                 <a:latin typeface="맑은 고딕"/>
               </a:rPr>
-              <a:t>Case 5 · 재기동에도 살아남는 OAuth 토큰 생명주기 관리</a:t>
+              <a:t>Case 4 · 인프라 모니터링에 업무 지표 통합</a:t>
             </a:r>
           </a:p>
         </p:txBody>
@@ -10367,7 +12536,7 @@
                 </a:solidFill>
                 <a:latin typeface="맑은 고딕"/>
               </a:rPr>
-              <a:t>장애 알림용 메신저 API는 6시간 액세스 토큰 + 60일 리프레시 토큰(회전 가능) 구조</a:t>
+              <a:t>CPU/메모리/상태만 보여주던 대시보드에 '오늘 처리 건수'도 같이 보고 싶다는 요구</a:t>
             </a:r>
           </a:p>
         </p:txBody>
@@ -10457,7 +12626,7 @@
                 </a:solidFill>
                 <a:latin typeface="맑은 고딕"/>
               </a:rPr>
-              <a:t>단순 메모리 보관 시 재기동마다 재인증 필요, 토큰 회전을 놓치면 알림 영구 중단</a:t>
+              <a:t>Prometheus/Grafana 표준 스택엔 업무 지표를 낼 방법이 기본으로 없음</a:t>
             </a:r>
           </a:p>
         </p:txBody>
@@ -10547,7 +12716,7 @@
                 </a:solidFill>
                 <a:latin typeface="맑은 고딕"/>
               </a:rPr>
-              <a:t>액세스 토큰은 5시간 주기 자동 갱신, 리프레시 토큰은 회전 시마다 파일에 원자적으로 재저장</a:t>
+              <a:t>node_exporter textfile collector + cron 스크립트로 커스텀 지표 노출, PromQL 'and on(label)'로 유령 데이터(미존재 인스턴스) 필터링</a:t>
             </a:r>
           </a:p>
         </p:txBody>
@@ -10637,7 +12806,7 @@
                 </a:solidFill>
                 <a:latin typeface="맑은 고딕"/>
               </a:rPr>
-              <a:t>외부 API 토큰 생명주기는 '재기동돼도 동작하는가'까지 설계에 반영</a:t>
+              <a:t>'별도 시스템 필요'라 단정 말고 기존 스택의 확장 포인트를 먼저 탐색</a:t>
             </a:r>
           </a:p>
         </p:txBody>
